--- a/docs/CIMET_QA_Gate_Demo.pptx
+++ b/docs/CIMET_QA_Gate_Demo.pptx
@@ -4,6 +4,9 @@
   <p:sldMasterIdLst>
     <p:sldMasterId id="2147483648" r:id="rId1"/>
   </p:sldMasterIdLst>
+  <p:notesMasterIdLst>
+    <p:notesMasterId r:id="rId17"/>
+  </p:notesMasterIdLst>
   <p:sldIdLst>
     <p:sldId id="256" r:id="rId2"/>
     <p:sldId id="257" r:id="rId3"/>
@@ -21,9 +24,6 @@
     <p:sldId id="269" r:id="rId15"/>
     <p:sldId id="270" r:id="rId16"/>
   </p:sldIdLst>
-  <p:notesMasterIdLst>
-    <p:notesMasterId r:id="rId17"/>
-  </p:notesMasterIdLst>
   <p:sldSz cx="12192000" cy="6858000"/>
   <p:notesSz cx="6858000" cy="12192000"/>
   <p:defaultTextStyle>
@@ -118,6 +118,11 @@
       </a:defRPr>
     </a:lvl9pPr>
   </p:defaultTextStyle>
+  <p:extLst>
+    <p:ext uri="{EFAFB233-063F-42B5-8137-9DF3F51BA10A}">
+      <p15:sldGuideLst xmlns:p15="http://schemas.microsoft.com/office/powerpoint/2012/main"/>
+    </p:ext>
+  </p:extLst>
 </p:presentation>
 </file>
 
@@ -143,234 +148,10 @@
           <a:chExt cx="0" cy="0"/>
         </a:xfrm>
       </p:grpSpPr>
-      <p:sp>
-        <p:nvSpPr>
-          <p:cNvPr id="2" name="Header Placeholder 1"/>
-          <p:cNvSpPr>
-            <a:spLocks noGrp="1"/>
-          </p:cNvSpPr>
-          <p:nvPr>
-            <p:ph type="hdr" sz="quarter"/>
-          </p:nvPr>
-        </p:nvSpPr>
-        <p:spPr>
-          <a:xfrm>
-            <a:off x="0" y="0"/>
-            <a:ext cx="2971800" cy="458788"/>
-          </a:xfrm>
-          <a:prstGeom prst="rect">
-            <a:avLst/>
-          </a:prstGeom>
-        </p:spPr>
-        <p:txBody>
-          <a:bodyPr vert="horz" lIns="91440" tIns="45720" rIns="91440" bIns="45720" rtlCol="0"/>
-          <a:lstStyle>
-            <a:lvl1pPr algn="l">
-              <a:defRPr sz="1200"/>
-            </a:lvl1pPr>
-          </a:lstStyle>
-          <a:p>
-            <a:endParaRPr lang="en-US"/>
-          </a:p>
-        </p:txBody>
-      </p:sp>
-      <p:sp>
-        <p:nvSpPr>
-          <p:cNvPr id="3" name="Date Placeholder 2"/>
-          <p:cNvSpPr>
-            <a:spLocks noGrp="1"/>
-          </p:cNvSpPr>
-          <p:nvPr>
-            <p:ph type="dt" idx="1"/>
-          </p:nvPr>
-        </p:nvSpPr>
-        <p:spPr>
-          <a:xfrm>
-            <a:off x="3884613" y="0"/>
-            <a:ext cx="2971800" cy="458788"/>
-          </a:xfrm>
-          <a:prstGeom prst="rect">
-            <a:avLst/>
-          </a:prstGeom>
-        </p:spPr>
-        <p:txBody>
-          <a:bodyPr vert="horz" lIns="91440" tIns="45720" rIns="91440" bIns="45720" rtlCol="0"/>
-          <a:lstStyle>
-            <a:lvl1pPr algn="r">
-              <a:defRPr sz="1200"/>
-            </a:lvl1pPr>
-          </a:lstStyle>
-          <a:p>
-            <a:fld id="{5282F153-3F37-0F45-9E97-73ACFA13230C}" type="datetimeFigureOut">
-              <a:rPr lang="en-US"/>
-              <a:t>7/23/19</a:t>
-            </a:fld>
-            <a:endParaRPr lang="en-US"/>
-          </a:p>
-        </p:txBody>
-      </p:sp>
-      <p:sp>
-        <p:nvSpPr>
-          <p:cNvPr id="4" name="Slide Image Placeholder 3"/>
-          <p:cNvSpPr>
-            <a:spLocks noGrp="1" noRot="1" noChangeAspect="1"/>
-          </p:cNvSpPr>
-          <p:nvPr>
-            <p:ph type="sldImg" idx="2"/>
-          </p:nvPr>
-        </p:nvSpPr>
-        <p:spPr>
-          <a:xfrm>
-            <a:off x="685800" y="1143000"/>
-            <a:ext cx="5486400" cy="3086100"/>
-          </a:xfrm>
-          <a:prstGeom prst="rect">
-            <a:avLst/>
-          </a:prstGeom>
-          <a:noFill/>
-          <a:ln w="12700">
-            <a:solidFill>
-              <a:prstClr val="black"/>
-            </a:solidFill>
-          </a:ln>
-        </p:spPr>
-        <p:txBody>
-          <a:bodyPr vert="horz" lIns="91440" tIns="45720" rIns="91440" bIns="45720" rtlCol="0" anchor="ctr"/>
-          <a:lstStyle/>
-          <a:p>
-            <a:endParaRPr lang="en-US"/>
-          </a:p>
-        </p:txBody>
-      </p:sp>
-      <p:sp>
-        <p:nvSpPr>
-          <p:cNvPr id="5" name="Notes Placeholder 4"/>
-          <p:cNvSpPr>
-            <a:spLocks noGrp="1"/>
-          </p:cNvSpPr>
-          <p:nvPr>
-            <p:ph type="body" sz="quarter" idx="3"/>
-          </p:nvPr>
-        </p:nvSpPr>
-        <p:spPr>
-          <a:xfrm>
-            <a:off x="685800" y="4400550"/>
-            <a:ext cx="5486400" cy="3600450"/>
-          </a:xfrm>
-          <a:prstGeom prst="rect">
-            <a:avLst/>
-          </a:prstGeom>
-        </p:spPr>
-        <p:txBody>
-          <a:bodyPr vert="horz" lIns="91440" tIns="45720" rIns="91440" bIns="45720" rtlCol="0"/>
-          <a:lstStyle/>
-          <a:p>
-            <a:pPr lvl="0"/>
-            <a:r>
-              <a:rPr lang="en-US"/>
-              <a:t>Click to edit Master text styles</a:t>
-            </a:r>
-          </a:p>
-          <a:p>
-            <a:pPr lvl="1"/>
-            <a:r>
-              <a:rPr lang="en-US"/>
-              <a:t>Second level</a:t>
-            </a:r>
-          </a:p>
-          <a:p>
-            <a:pPr lvl="2"/>
-            <a:r>
-              <a:rPr lang="en-US"/>
-              <a:t>Third level</a:t>
-            </a:r>
-          </a:p>
-          <a:p>
-            <a:pPr lvl="3"/>
-            <a:r>
-              <a:rPr lang="en-US"/>
-              <a:t>Fourth level</a:t>
-            </a:r>
-          </a:p>
-          <a:p>
-            <a:pPr lvl="4"/>
-            <a:r>
-              <a:rPr lang="en-US"/>
-              <a:t>Fifth level</a:t>
-            </a:r>
-          </a:p>
-        </p:txBody>
-      </p:sp>
-      <p:sp>
-        <p:nvSpPr>
-          <p:cNvPr id="6" name="Footer Placeholder 5"/>
-          <p:cNvSpPr>
-            <a:spLocks noGrp="1"/>
-          </p:cNvSpPr>
-          <p:nvPr>
-            <p:ph type="ftr" sz="quarter" idx="4"/>
-          </p:nvPr>
-        </p:nvSpPr>
-        <p:spPr>
-          <a:xfrm>
-            <a:off x="0" y="8685213"/>
-            <a:ext cx="2971800" cy="458787"/>
-          </a:xfrm>
-          <a:prstGeom prst="rect">
-            <a:avLst/>
-          </a:prstGeom>
-        </p:spPr>
-        <p:txBody>
-          <a:bodyPr vert="horz" lIns="91440" tIns="45720" rIns="91440" bIns="45720" rtlCol="0" anchor="b"/>
-          <a:lstStyle>
-            <a:lvl1pPr algn="l">
-              <a:defRPr sz="1200"/>
-            </a:lvl1pPr>
-          </a:lstStyle>
-          <a:p>
-            <a:endParaRPr lang="en-US"/>
-          </a:p>
-        </p:txBody>
-      </p:sp>
-      <p:sp>
-        <p:nvSpPr>
-          <p:cNvPr id="7" name="Slide Number Placeholder 6"/>
-          <p:cNvSpPr>
-            <a:spLocks noGrp="1"/>
-          </p:cNvSpPr>
-          <p:nvPr>
-            <p:ph type="sldNum" sz="quarter" idx="5"/>
-          </p:nvPr>
-        </p:nvSpPr>
-        <p:spPr>
-          <a:xfrm>
-            <a:off x="3884613" y="8685213"/>
-            <a:ext cx="2971800" cy="458787"/>
-          </a:xfrm>
-          <a:prstGeom prst="rect">
-            <a:avLst/>
-          </a:prstGeom>
-        </p:spPr>
-        <p:txBody>
-          <a:bodyPr vert="horz" lIns="91440" tIns="45720" rIns="91440" bIns="45720" rtlCol="0" anchor="b"/>
-          <a:lstStyle>
-            <a:lvl1pPr algn="r">
-              <a:defRPr sz="1200"/>
-            </a:lvl1pPr>
-          </a:lstStyle>
-          <a:p>
-            <a:fld id="{CE5E9CC1-C706-0F49-92D6-E571CC5EEA8F}" type="slidenum">
-              <a:rPr lang="en-US"/>
-              <a:t>‹#›</a:t>
-            </a:fld>
-            <a:endParaRPr lang="en-US"/>
-          </a:p>
-        </p:txBody>
-      </p:sp>
     </p:spTree>
     <p:extLst>
       <p:ext uri="{BB962C8B-B14F-4D97-AF65-F5344CB8AC3E}">
-        <p14:creationId xmlns:p14="http://schemas.microsoft.com/office/powerpoint/2010/main" val="1024086991"/>
+        <p14:creationId xmlns:p14="http://schemas.microsoft.com/office/powerpoint/2010/main" val="1286210933"/>
       </p:ext>
     </p:extLst>
   </p:cSld>
@@ -519,7 +300,6 @@
               <a:t>OPENING (20 sec): 'Sales calls are regulated. Before a sale goes to the retailer, someone has to be sure the agent said the right things. We built a gate that scores every sale from the call itself and gives one of three outcomes.'
 KEY LINE to repeat all talk: the model helps read, the code decides.</a:t>
             </a:r>
-            <a:endParaRPr lang="en-US" dirty="0"/>
           </a:p>
         </p:txBody>
       </p:sp>
@@ -608,7 +388,6 @@
               <a:t>HINT: This is the 'enterprise' slide. Auditors care about: which rules applied, what evidence, who changed what.
 SQLite is used only by tests; the running app uses PostgreSQL.</a:t>
             </a:r>
-            <a:endParaRPr lang="en-US" dirty="0"/>
           </a:p>
         </p:txBody>
       </p:sp>
@@ -698,7 +477,6 @@
 Suggested order: 01 (approved) -&gt; 02 (hold, show evidence + audio jump) -&gt; 06 (human review, explain why uncertainty is not a pass).
 The form is prefilled from the 'Fill sample details' dropdown; you can edit any field.</a:t>
             </a:r>
-            <a:endParaRPr lang="en-US" dirty="0"/>
           </a:p>
         </p:txBody>
       </p:sp>
@@ -787,7 +565,6 @@
               <a:t>HINT: Say 'the call did not change, the record did'. Then point to the run comparison: it shows which check flipped from FAIL to PASS.
 The Demo data page only exists when DEMO_MODE=true and only allows edits to a whitelist of tables (leads, rate cards, transcript segments).</a:t>
             </a:r>
-            <a:endParaRPr lang="en-US" dirty="0"/>
           </a:p>
         </p:txBody>
       </p:sp>
@@ -876,7 +653,6 @@
               <a:t>HINT: One sentence per row. Why each: FastAPI+Pydantic for typed contracts; Alembic for repeatable schema; PostgreSQL for JSONB and real concurrency; Groq for speed and a free tier; React+TS for a typed UI.
 Secrets live in backend/.env which is git-ignored.</a:t>
             </a:r>
-            <a:endParaRPr lang="en-US" dirty="0"/>
           </a:p>
         </p:txBody>
       </p:sp>
@@ -965,7 +741,6 @@
               <a:t>HINT: Say the limitation before anyone asks. It builds trust. The key sentence: 'Errors move sales toward hold or review, never toward approval.'
 The one thing ASR cannot rule out is a mis-heard figure that equals the CRM value, which is why every check links to the exact audio moment.</a:t>
             </a:r>
-            <a:endParaRPr lang="en-US" dirty="0"/>
           </a:p>
         </p:txBody>
       </p:sp>
@@ -1053,7 +828,6 @@
               <a:rPr lang="en-US" dirty="0"/>
               <a:t>CLOSE: Repeat the three points, then take questions. Have docs/ARCHITECTURE_AND_INTERVIEW_PREP.md open for detailed answers.</a:t>
             </a:r>
-            <a:endParaRPr lang="en-US" dirty="0"/>
           </a:p>
         </p:txBody>
       </p:sp>
@@ -1141,7 +915,6 @@
               <a:rPr lang="en-US" dirty="0"/>
               <a:t>HINT: Start with the cost asymmetry. A false pass (approve a bad sale) is far worse than a false hold. Everything in the design follows from that. If asked 'why not just use ChatGPT?', jump to slide 7.</a:t>
             </a:r>
-            <a:endParaRPr lang="en-US" dirty="0"/>
           </a:p>
         </p:txBody>
       </p:sp>
@@ -1229,7 +1002,6 @@
               <a:rPr lang="en-US" dirty="0"/>
               <a:t>HINT: Walk left to right in one breath. Then point at the three cards: evidence, immutability, human control. These are the three things auditors ask about.</a:t>
             </a:r>
-            <a:endParaRPr lang="en-US" dirty="0"/>
           </a:p>
         </p:txBody>
       </p:sp>
@@ -1319,7 +1091,6 @@
 Point at the purple box: the LLM is one small box and it feeds an evaluator, not the gate. The green box is plain code.
 Adding a check = adding a database row with a method (verbatim/factual/behaviour/semantic) and a config.</a:t>
             </a:r>
-            <a:endParaRPr lang="en-US" dirty="0"/>
           </a:p>
         </p:txBody>
       </p:sp>
@@ -1408,7 +1179,6 @@
               <a:t>HINT: Three of the four methods are pure code. Say the ratio out loud: most checks are deterministic.
 The engine always does locate -&gt; extract -&gt; validate: find the relevant lines, read the value, compare against the record. The record (CRM / rate card by call date) is the truth, never the model.</a:t>
             </a:r>
-            <a:endParaRPr lang="en-US" dirty="0"/>
           </a:p>
         </p:txBody>
       </p:sp>
@@ -1498,7 +1268,6 @@
 Important nuance if asked: a check that errors sends the sale to review even if it looks clean. That is deliberate: 'a failed execution never approves'. It is a policy choice that can be relaxed later.
 Hold = something is wrong. Human review = we cannot tell.</a:t>
             </a:r>
-            <a:endParaRPr lang="en-US" dirty="0"/>
           </a:p>
         </p:txBody>
       </p:sp>
@@ -1590,7 +1359,6 @@
 3) LLM is not a fallback: a deterministic FAIL is never re-asked to a model 'to see if it changes its mind'.
 If challenged: 'Which errors can a model make that code cannot? Confident wrong answers, and different answers on different days.'</a:t>
             </a:r>
-            <a:endParaRPr lang="en-US" dirty="0"/>
           </a:p>
         </p:txBody>
       </p:sp>
@@ -1679,7 +1447,6 @@
               <a:t>HINT: Pick 2-3 to explain in detail rather than reading all eight. Good ones: 'off-peak vs peak' (a real bug we hit), hedged values, and conflicting values.
 Every guard is a unit test in tests/test_false_pass_guards.py. All of them push toward UNCERTAIN or FAIL, never toward PASS.</a:t>
             </a:r>
-            <a:endParaRPr lang="en-US" dirty="0"/>
           </a:p>
         </p:txBody>
       </p:sp>
@@ -1769,7 +1536,6 @@
 Be honest: live Whisper can drop decimals or merge turns on fast speech. Every error we saw moved a sale to a MORE cautious gate, never toward approved.
 We tried a Whisper prompt hint and removed it because it leaked its own words into the transcript.</a:t>
             </a:r>
-            <a:endParaRPr lang="en-US" dirty="0"/>
           </a:p>
         </p:txBody>
       </p:sp>
@@ -1842,6 +1608,11 @@
 <file path=ppt/slideMasters/slideMaster1.xml><?xml version="1.0" encoding="utf-8"?>
 <p:sldMaster xmlns:a="http://schemas.openxmlformats.org/drawingml/2006/main" xmlns:r="http://schemas.openxmlformats.org/officeDocument/2006/relationships" xmlns:p="http://schemas.openxmlformats.org/presentationml/2006/main">
   <p:cSld>
+    <p:bg>
+      <p:bgRef idx="1001">
+        <a:schemeClr val="bg1"/>
+      </p:bgRef>
+    </p:bg>
     <p:spTree>
       <p:nvGrpSpPr>
         <p:cNvPr id="1" name=""/>
@@ -2124,6 +1895,7 @@
         <a:solidFill>
           <a:srgbClr val="14213D"/>
         </a:solidFill>
+        <a:effectLst/>
       </p:bgPr>
     </p:bg>
     <p:spTree>
@@ -2161,11 +1933,11 @@
           <a:bodyPr wrap="square" lIns="0" tIns="0" rIns="0" bIns="0" rtlCol="0" anchor="ctr"/>
           <a:lstStyle/>
           <a:p>
-            <a:pPr indent="0" marL="0">
-              <a:buNone/>
-            </a:pPr>
-            <a:r>
-              <a:rPr lang="en-US" sz="1600" b="1" spc="600" kern="0" dirty="0">
+            <a:pPr marL="0" indent="0">
+              <a:buNone/>
+            </a:pPr>
+            <a:r>
+              <a:rPr lang="en-US" sz="1600" b="1" kern="0" spc="600" dirty="0">
                 <a:solidFill>
                   <a:srgbClr val="0FA3B1"/>
                 </a:solidFill>
@@ -2200,7 +1972,7 @@
           <a:bodyPr wrap="square" lIns="0" tIns="0" rIns="0" bIns="0" rtlCol="0" anchor="ctr"/>
           <a:lstStyle/>
           <a:p>
-            <a:pPr indent="0" marL="0">
+            <a:pPr marL="0" indent="0">
               <a:buNone/>
             </a:pPr>
             <a:r>
@@ -2239,7 +2011,7 @@
           <a:bodyPr wrap="square" lIns="0" tIns="0" rIns="0" bIns="0" rtlCol="0" anchor="t"/>
           <a:lstStyle/>
           <a:p>
-            <a:pPr indent="0" marL="0">
+            <a:pPr marL="0" indent="0">
               <a:buNone/>
             </a:pPr>
             <a:r>
@@ -2283,6 +2055,13 @@
             <a:prstDash val="solid"/>
           </a:ln>
         </p:spPr>
+        <p:txBody>
+          <a:bodyPr/>
+          <a:lstStyle/>
+          <a:p>
+            <a:endParaRPr lang="en-IN"/>
+          </a:p>
+        </p:txBody>
       </p:sp>
       <p:sp>
         <p:nvSpPr>
@@ -2305,7 +2084,7 @@
           <a:bodyPr wrap="square" lIns="0" tIns="0" rIns="0" bIns="0" rtlCol="0" anchor="ctr"/>
           <a:lstStyle/>
           <a:p>
-            <a:pPr algn="ctr" indent="0" marL="0">
+            <a:pPr marL="0" indent="0" algn="ctr">
               <a:buNone/>
             </a:pPr>
             <a:r>
@@ -2349,6 +2128,13 @@
             <a:prstDash val="solid"/>
           </a:ln>
         </p:spPr>
+        <p:txBody>
+          <a:bodyPr/>
+          <a:lstStyle/>
+          <a:p>
+            <a:endParaRPr lang="en-IN"/>
+          </a:p>
+        </p:txBody>
       </p:sp>
       <p:sp>
         <p:nvSpPr>
@@ -2371,7 +2157,7 @@
           <a:bodyPr wrap="square" lIns="0" tIns="0" rIns="0" bIns="0" rtlCol="0" anchor="ctr"/>
           <a:lstStyle/>
           <a:p>
-            <a:pPr algn="ctr" indent="0" marL="0">
+            <a:pPr marL="0" indent="0" algn="ctr">
               <a:buNone/>
             </a:pPr>
             <a:r>
@@ -2415,6 +2201,13 @@
             <a:prstDash val="solid"/>
           </a:ln>
         </p:spPr>
+        <p:txBody>
+          <a:bodyPr/>
+          <a:lstStyle/>
+          <a:p>
+            <a:endParaRPr lang="en-IN"/>
+          </a:p>
+        </p:txBody>
       </p:sp>
       <p:sp>
         <p:nvSpPr>
@@ -2437,7 +2230,7 @@
           <a:bodyPr wrap="square" lIns="0" tIns="0" rIns="0" bIns="0" rtlCol="0" anchor="ctr"/>
           <a:lstStyle/>
           <a:p>
-            <a:pPr algn="ctr" indent="0" marL="0">
+            <a:pPr marL="0" indent="0" algn="ctr">
               <a:buNone/>
             </a:pPr>
             <a:r>
@@ -2476,7 +2269,7 @@
           <a:bodyPr wrap="square" lIns="0" tIns="0" rIns="0" bIns="0" rtlCol="0" anchor="ctr"/>
           <a:lstStyle/>
           <a:p>
-            <a:pPr indent="0" marL="0">
+            <a:pPr marL="0" indent="0">
               <a:buNone/>
             </a:pPr>
             <a:r>
@@ -2510,6 +2303,7 @@
         <a:solidFill>
           <a:srgbClr val="FFFFFF"/>
         </a:solidFill>
+        <a:effectLst/>
       </p:bgPr>
     </p:bg>
     <p:spTree>
@@ -2547,11 +2341,11 @@
           <a:bodyPr wrap="square" lIns="0" tIns="0" rIns="0" bIns="0" rtlCol="0" anchor="ctr"/>
           <a:lstStyle/>
           <a:p>
-            <a:pPr indent="0" marL="0">
-              <a:buNone/>
-            </a:pPr>
-            <a:r>
-              <a:rPr lang="en-US" sz="1200" b="1" spc="300" kern="0" dirty="0">
+            <a:pPr marL="0" indent="0">
+              <a:buNone/>
+            </a:pPr>
+            <a:r>
+              <a:rPr lang="en-US" sz="1200" b="1" kern="0" spc="300" dirty="0">
                 <a:solidFill>
                   <a:srgbClr val="0B7A85"/>
                 </a:solidFill>
@@ -2586,7 +2380,7 @@
           <a:bodyPr wrap="square" lIns="0" tIns="0" rIns="0" bIns="0" rtlCol="0" anchor="t"/>
           <a:lstStyle/>
           <a:p>
-            <a:pPr indent="0" marL="0">
+            <a:pPr marL="0" indent="0">
               <a:buNone/>
             </a:pPr>
             <a:r>
@@ -2630,6 +2424,13 @@
             <a:prstDash val="solid"/>
           </a:ln>
         </p:spPr>
+        <p:txBody>
+          <a:bodyPr/>
+          <a:lstStyle/>
+          <a:p>
+            <a:endParaRPr lang="en-IN"/>
+          </a:p>
+        </p:txBody>
       </p:sp>
       <p:sp>
         <p:nvSpPr>
@@ -2652,7 +2453,7 @@
           <a:bodyPr wrap="square" lIns="0" tIns="0" rIns="0" bIns="0" rtlCol="0" anchor="ctr"/>
           <a:lstStyle/>
           <a:p>
-            <a:pPr indent="0" marL="0">
+            <a:pPr marL="0" indent="0">
               <a:buNone/>
             </a:pPr>
             <a:r>
@@ -2691,7 +2492,7 @@
           <a:bodyPr wrap="square" lIns="0" tIns="0" rIns="0" bIns="0" rtlCol="0" anchor="t"/>
           <a:lstStyle/>
           <a:p>
-            <a:pPr indent="0" marL="0">
+            <a:pPr marL="0" indent="0">
               <a:buNone/>
             </a:pPr>
             <a:r>
@@ -2735,6 +2536,13 @@
             <a:prstDash val="solid"/>
           </a:ln>
         </p:spPr>
+        <p:txBody>
+          <a:bodyPr/>
+          <a:lstStyle/>
+          <a:p>
+            <a:endParaRPr lang="en-IN"/>
+          </a:p>
+        </p:txBody>
       </p:sp>
       <p:sp>
         <p:nvSpPr>
@@ -2757,7 +2565,7 @@
           <a:bodyPr wrap="square" lIns="0" tIns="0" rIns="0" bIns="0" rtlCol="0" anchor="ctr"/>
           <a:lstStyle/>
           <a:p>
-            <a:pPr indent="0" marL="0">
+            <a:pPr marL="0" indent="0">
               <a:buNone/>
             </a:pPr>
             <a:r>
@@ -2796,7 +2604,7 @@
           <a:bodyPr wrap="square" lIns="0" tIns="0" rIns="0" bIns="0" rtlCol="0" anchor="t"/>
           <a:lstStyle/>
           <a:p>
-            <a:pPr indent="0" marL="0">
+            <a:pPr marL="0" indent="0">
               <a:buNone/>
             </a:pPr>
             <a:r>
@@ -2840,6 +2648,13 @@
             <a:prstDash val="solid"/>
           </a:ln>
         </p:spPr>
+        <p:txBody>
+          <a:bodyPr/>
+          <a:lstStyle/>
+          <a:p>
+            <a:endParaRPr lang="en-IN"/>
+          </a:p>
+        </p:txBody>
       </p:sp>
       <p:sp>
         <p:nvSpPr>
@@ -2862,7 +2677,7 @@
           <a:bodyPr wrap="square" lIns="0" tIns="0" rIns="0" bIns="0" rtlCol="0" anchor="ctr"/>
           <a:lstStyle/>
           <a:p>
-            <a:pPr indent="0" marL="0">
+            <a:pPr marL="0" indent="0">
               <a:buNone/>
             </a:pPr>
             <a:r>
@@ -2901,7 +2716,7 @@
           <a:bodyPr wrap="square" lIns="0" tIns="0" rIns="0" bIns="0" rtlCol="0" anchor="t"/>
           <a:lstStyle/>
           <a:p>
-            <a:pPr indent="0" marL="0">
+            <a:pPr marL="0" indent="0">
               <a:buNone/>
             </a:pPr>
             <a:r>
@@ -2945,6 +2760,13 @@
             <a:prstDash val="solid"/>
           </a:ln>
         </p:spPr>
+        <p:txBody>
+          <a:bodyPr/>
+          <a:lstStyle/>
+          <a:p>
+            <a:endParaRPr lang="en-IN"/>
+          </a:p>
+        </p:txBody>
       </p:sp>
       <p:sp>
         <p:nvSpPr>
@@ -2967,7 +2789,7 @@
           <a:bodyPr wrap="square" lIns="0" tIns="0" rIns="0" bIns="0" rtlCol="0" anchor="ctr"/>
           <a:lstStyle/>
           <a:p>
-            <a:pPr indent="0" marL="0">
+            <a:pPr marL="0" indent="0">
               <a:buNone/>
             </a:pPr>
             <a:r>
@@ -3006,7 +2828,7 @@
           <a:bodyPr wrap="square" lIns="0" tIns="0" rIns="0" bIns="0" rtlCol="0" anchor="t"/>
           <a:lstStyle/>
           <a:p>
-            <a:pPr indent="0" marL="0">
+            <a:pPr marL="0" indent="0">
               <a:buNone/>
             </a:pPr>
             <a:r>
@@ -3050,6 +2872,13 @@
             <a:prstDash val="solid"/>
           </a:ln>
         </p:spPr>
+        <p:txBody>
+          <a:bodyPr/>
+          <a:lstStyle/>
+          <a:p>
+            <a:endParaRPr lang="en-IN"/>
+          </a:p>
+        </p:txBody>
       </p:sp>
       <p:sp>
         <p:nvSpPr>
@@ -3072,7 +2901,7 @@
           <a:bodyPr wrap="square" lIns="0" tIns="0" rIns="0" bIns="0" rtlCol="0" anchor="ctr"/>
           <a:lstStyle/>
           <a:p>
-            <a:pPr indent="0" marL="0">
+            <a:pPr marL="0" indent="0">
               <a:buNone/>
             </a:pPr>
             <a:r>
@@ -3111,7 +2940,7 @@
           <a:bodyPr wrap="square" lIns="0" tIns="0" rIns="0" bIns="0" rtlCol="0" anchor="t"/>
           <a:lstStyle/>
           <a:p>
-            <a:pPr indent="0" marL="0">
+            <a:pPr marL="0" indent="0">
               <a:buNone/>
             </a:pPr>
             <a:r>
@@ -3155,6 +2984,13 @@
             <a:prstDash val="solid"/>
           </a:ln>
         </p:spPr>
+        <p:txBody>
+          <a:bodyPr/>
+          <a:lstStyle/>
+          <a:p>
+            <a:endParaRPr lang="en-IN"/>
+          </a:p>
+        </p:txBody>
       </p:sp>
       <p:sp>
         <p:nvSpPr>
@@ -3177,7 +3013,7 @@
           <a:bodyPr wrap="square" lIns="0" tIns="0" rIns="0" bIns="0" rtlCol="0" anchor="ctr"/>
           <a:lstStyle/>
           <a:p>
-            <a:pPr indent="0" marL="0">
+            <a:pPr marL="0" indent="0">
               <a:buNone/>
             </a:pPr>
             <a:r>
@@ -3216,7 +3052,7 @@
           <a:bodyPr wrap="square" lIns="0" tIns="0" rIns="0" bIns="0" rtlCol="0" anchor="t"/>
           <a:lstStyle/>
           <a:p>
-            <a:pPr indent="0" marL="0">
+            <a:pPr marL="0" indent="0">
               <a:buNone/>
             </a:pPr>
             <a:r>
@@ -3250,6 +3086,7 @@
         <a:solidFill>
           <a:srgbClr val="FFFFFF"/>
         </a:solidFill>
+        <a:effectLst/>
       </p:bgPr>
     </p:bg>
     <p:spTree>
@@ -3287,11 +3124,11 @@
           <a:bodyPr wrap="square" lIns="0" tIns="0" rIns="0" bIns="0" rtlCol="0" anchor="ctr"/>
           <a:lstStyle/>
           <a:p>
-            <a:pPr indent="0" marL="0">
-              <a:buNone/>
-            </a:pPr>
-            <a:r>
-              <a:rPr lang="en-US" sz="1200" b="1" spc="300" kern="0" dirty="0">
+            <a:pPr marL="0" indent="0">
+              <a:buNone/>
+            </a:pPr>
+            <a:r>
+              <a:rPr lang="en-US" sz="1200" b="1" kern="0" spc="300" dirty="0">
                 <a:solidFill>
                   <a:srgbClr val="0B7A85"/>
                 </a:solidFill>
@@ -3326,7 +3163,7 @@
           <a:bodyPr wrap="square" lIns="0" tIns="0" rIns="0" bIns="0" rtlCol="0" anchor="t"/>
           <a:lstStyle/>
           <a:p>
-            <a:pPr indent="0" marL="0">
+            <a:pPr marL="0" indent="0">
               <a:buNone/>
             </a:pPr>
             <a:r>
@@ -3368,6 +3205,13 @@
             <a:prstDash val="solid"/>
           </a:ln>
         </p:spPr>
+        <p:txBody>
+          <a:bodyPr/>
+          <a:lstStyle/>
+          <a:p>
+            <a:endParaRPr lang="en-IN"/>
+          </a:p>
+        </p:txBody>
       </p:sp>
       <p:sp>
         <p:nvSpPr>
@@ -3390,7 +3234,7 @@
           <a:bodyPr wrap="square" lIns="0" tIns="0" rIns="0" bIns="0" rtlCol="0" anchor="ctr"/>
           <a:lstStyle/>
           <a:p>
-            <a:pPr algn="ctr" indent="0" marL="0">
+            <a:pPr marL="0" indent="0" algn="ctr">
               <a:buNone/>
             </a:pPr>
             <a:r>
@@ -3429,7 +3273,7 @@
           <a:bodyPr wrap="square" lIns="0" tIns="0" rIns="0" bIns="0" rtlCol="0" anchor="ctr"/>
           <a:lstStyle/>
           <a:p>
-            <a:pPr algn="ctr" indent="0" marL="0">
+            <a:pPr marL="0" indent="0" algn="ctr">
               <a:buNone/>
             </a:pPr>
             <a:r>
@@ -3468,7 +3312,7 @@
           <a:bodyPr wrap="square" lIns="0" tIns="0" rIns="0" bIns="0" rtlCol="0" anchor="t"/>
           <a:lstStyle/>
           <a:p>
-            <a:pPr algn="ctr" indent="0" marL="0">
+            <a:pPr marL="0" indent="0" algn="ctr">
               <a:buNone/>
             </a:pPr>
             <a:r>
@@ -3510,6 +3354,13 @@
             <a:prstDash val="solid"/>
           </a:ln>
         </p:spPr>
+        <p:txBody>
+          <a:bodyPr/>
+          <a:lstStyle/>
+          <a:p>
+            <a:endParaRPr lang="en-IN"/>
+          </a:p>
+        </p:txBody>
       </p:sp>
       <p:sp>
         <p:nvSpPr>
@@ -3532,7 +3383,7 @@
           <a:bodyPr wrap="square" lIns="0" tIns="0" rIns="0" bIns="0" rtlCol="0" anchor="ctr"/>
           <a:lstStyle/>
           <a:p>
-            <a:pPr algn="ctr" indent="0" marL="0">
+            <a:pPr marL="0" indent="0" algn="ctr">
               <a:buNone/>
             </a:pPr>
             <a:r>
@@ -3571,7 +3422,7 @@
           <a:bodyPr wrap="square" lIns="0" tIns="0" rIns="0" bIns="0" rtlCol="0" anchor="ctr"/>
           <a:lstStyle/>
           <a:p>
-            <a:pPr algn="ctr" indent="0" marL="0">
+            <a:pPr marL="0" indent="0" algn="ctr">
               <a:buNone/>
             </a:pPr>
             <a:r>
@@ -3610,7 +3461,7 @@
           <a:bodyPr wrap="square" lIns="0" tIns="0" rIns="0" bIns="0" rtlCol="0" anchor="t"/>
           <a:lstStyle/>
           <a:p>
-            <a:pPr algn="ctr" indent="0" marL="0">
+            <a:pPr marL="0" indent="0" algn="ctr">
               <a:buNone/>
             </a:pPr>
             <a:r>
@@ -3652,6 +3503,13 @@
             <a:prstDash val="solid"/>
           </a:ln>
         </p:spPr>
+        <p:txBody>
+          <a:bodyPr/>
+          <a:lstStyle/>
+          <a:p>
+            <a:endParaRPr lang="en-IN"/>
+          </a:p>
+        </p:txBody>
       </p:sp>
       <p:sp>
         <p:nvSpPr>
@@ -3674,7 +3532,7 @@
           <a:bodyPr wrap="square" lIns="0" tIns="0" rIns="0" bIns="0" rtlCol="0" anchor="ctr"/>
           <a:lstStyle/>
           <a:p>
-            <a:pPr algn="ctr" indent="0" marL="0">
+            <a:pPr marL="0" indent="0" algn="ctr">
               <a:buNone/>
             </a:pPr>
             <a:r>
@@ -3713,7 +3571,7 @@
           <a:bodyPr wrap="square" lIns="0" tIns="0" rIns="0" bIns="0" rtlCol="0" anchor="ctr"/>
           <a:lstStyle/>
           <a:p>
-            <a:pPr algn="ctr" indent="0" marL="0">
+            <a:pPr marL="0" indent="0" algn="ctr">
               <a:buNone/>
             </a:pPr>
             <a:r>
@@ -3752,7 +3610,7 @@
           <a:bodyPr wrap="square" lIns="0" tIns="0" rIns="0" bIns="0" rtlCol="0" anchor="t"/>
           <a:lstStyle/>
           <a:p>
-            <a:pPr algn="ctr" indent="0" marL="0">
+            <a:pPr marL="0" indent="0" algn="ctr">
               <a:buNone/>
             </a:pPr>
             <a:r>
@@ -3794,6 +3652,13 @@
             <a:prstDash val="solid"/>
           </a:ln>
         </p:spPr>
+        <p:txBody>
+          <a:bodyPr/>
+          <a:lstStyle/>
+          <a:p>
+            <a:endParaRPr lang="en-IN"/>
+          </a:p>
+        </p:txBody>
       </p:sp>
       <p:sp>
         <p:nvSpPr>
@@ -3816,7 +3681,7 @@
           <a:bodyPr wrap="square" lIns="0" tIns="0" rIns="0" bIns="0" rtlCol="0" anchor="ctr"/>
           <a:lstStyle/>
           <a:p>
-            <a:pPr algn="ctr" indent="0" marL="0">
+            <a:pPr marL="0" indent="0" algn="ctr">
               <a:buNone/>
             </a:pPr>
             <a:r>
@@ -3855,7 +3720,7 @@
           <a:bodyPr wrap="square" lIns="0" tIns="0" rIns="0" bIns="0" rtlCol="0" anchor="ctr"/>
           <a:lstStyle/>
           <a:p>
-            <a:pPr algn="ctr" indent="0" marL="0">
+            <a:pPr marL="0" indent="0" algn="ctr">
               <a:buNone/>
             </a:pPr>
             <a:r>
@@ -3894,7 +3759,7 @@
           <a:bodyPr wrap="square" lIns="0" tIns="0" rIns="0" bIns="0" rtlCol="0" anchor="t"/>
           <a:lstStyle/>
           <a:p>
-            <a:pPr algn="ctr" indent="0" marL="0">
+            <a:pPr marL="0" indent="0" algn="ctr">
               <a:buNone/>
             </a:pPr>
             <a:r>
@@ -3936,6 +3801,13 @@
             <a:prstDash val="solid"/>
           </a:ln>
         </p:spPr>
+        <p:txBody>
+          <a:bodyPr/>
+          <a:lstStyle/>
+          <a:p>
+            <a:endParaRPr lang="en-IN"/>
+          </a:p>
+        </p:txBody>
       </p:sp>
       <p:sp>
         <p:nvSpPr>
@@ -3958,7 +3830,7 @@
           <a:bodyPr wrap="square" lIns="0" tIns="0" rIns="0" bIns="0" rtlCol="0" anchor="ctr"/>
           <a:lstStyle/>
           <a:p>
-            <a:pPr algn="ctr" indent="0" marL="0">
+            <a:pPr marL="0" indent="0" algn="ctr">
               <a:buNone/>
             </a:pPr>
             <a:r>
@@ -3997,7 +3869,7 @@
           <a:bodyPr wrap="square" lIns="0" tIns="0" rIns="0" bIns="0" rtlCol="0" anchor="ctr"/>
           <a:lstStyle/>
           <a:p>
-            <a:pPr algn="ctr" indent="0" marL="0">
+            <a:pPr marL="0" indent="0" algn="ctr">
               <a:buNone/>
             </a:pPr>
             <a:r>
@@ -4036,7 +3908,7 @@
           <a:bodyPr wrap="square" lIns="0" tIns="0" rIns="0" bIns="0" rtlCol="0" anchor="t"/>
           <a:lstStyle/>
           <a:p>
-            <a:pPr algn="ctr" indent="0" marL="0">
+            <a:pPr marL="0" indent="0" algn="ctr">
               <a:buNone/>
             </a:pPr>
             <a:r>
@@ -4075,7 +3947,7 @@
           <a:bodyPr wrap="square" lIns="0" tIns="0" rIns="0" bIns="0" rtlCol="0" anchor="ctr"/>
           <a:lstStyle/>
           <a:p>
-            <a:pPr indent="0" marL="0">
+            <a:pPr marL="0" indent="0">
               <a:buNone/>
             </a:pPr>
             <a:r>
@@ -4119,6 +3991,13 @@
             <a:prstDash val="solid"/>
           </a:ln>
         </p:spPr>
+        <p:txBody>
+          <a:bodyPr/>
+          <a:lstStyle/>
+          <a:p>
+            <a:endParaRPr lang="en-IN"/>
+          </a:p>
+        </p:txBody>
       </p:sp>
       <p:sp>
         <p:nvSpPr>
@@ -4141,7 +4020,7 @@
           <a:bodyPr wrap="square" lIns="0" tIns="0" rIns="0" bIns="0" rtlCol="0" anchor="ctr"/>
           <a:lstStyle/>
           <a:p>
-            <a:pPr indent="0" marL="0">
+            <a:pPr marL="0" indent="0">
               <a:buNone/>
             </a:pPr>
             <a:r>
@@ -4180,7 +4059,7 @@
           <a:bodyPr wrap="square" lIns="0" tIns="0" rIns="0" bIns="0" rtlCol="0" anchor="t"/>
           <a:lstStyle/>
           <a:p>
-            <a:pPr indent="0" marL="0">
+            <a:pPr marL="0" indent="0">
               <a:buNone/>
             </a:pPr>
             <a:r>
@@ -4224,6 +4103,13 @@
             <a:prstDash val="solid"/>
           </a:ln>
         </p:spPr>
+        <p:txBody>
+          <a:bodyPr/>
+          <a:lstStyle/>
+          <a:p>
+            <a:endParaRPr lang="en-IN"/>
+          </a:p>
+        </p:txBody>
       </p:sp>
       <p:sp>
         <p:nvSpPr>
@@ -4246,7 +4132,7 @@
           <a:bodyPr wrap="square" lIns="0" tIns="0" rIns="0" bIns="0" rtlCol="0" anchor="ctr"/>
           <a:lstStyle/>
           <a:p>
-            <a:pPr indent="0" marL="0">
+            <a:pPr marL="0" indent="0">
               <a:buNone/>
             </a:pPr>
             <a:r>
@@ -4285,7 +4171,7 @@
           <a:bodyPr wrap="square" lIns="0" tIns="0" rIns="0" bIns="0" rtlCol="0" anchor="t"/>
           <a:lstStyle/>
           <a:p>
-            <a:pPr indent="0" marL="0">
+            <a:pPr marL="0" indent="0">
               <a:buNone/>
             </a:pPr>
             <a:r>
@@ -4329,6 +4215,13 @@
             <a:prstDash val="solid"/>
           </a:ln>
         </p:spPr>
+        <p:txBody>
+          <a:bodyPr/>
+          <a:lstStyle/>
+          <a:p>
+            <a:endParaRPr lang="en-IN"/>
+          </a:p>
+        </p:txBody>
       </p:sp>
       <p:sp>
         <p:nvSpPr>
@@ -4351,7 +4244,7 @@
           <a:bodyPr wrap="square" lIns="0" tIns="0" rIns="0" bIns="0" rtlCol="0" anchor="ctr"/>
           <a:lstStyle/>
           <a:p>
-            <a:pPr indent="0" marL="0">
+            <a:pPr marL="0" indent="0">
               <a:buNone/>
             </a:pPr>
             <a:r>
@@ -4390,7 +4283,7 @@
           <a:bodyPr wrap="square" lIns="0" tIns="0" rIns="0" bIns="0" rtlCol="0" anchor="t"/>
           <a:lstStyle/>
           <a:p>
-            <a:pPr indent="0" marL="0">
+            <a:pPr marL="0" indent="0">
               <a:buNone/>
             </a:pPr>
             <a:r>
@@ -4424,6 +4317,7 @@
         <a:solidFill>
           <a:srgbClr val="FFFFFF"/>
         </a:solidFill>
+        <a:effectLst/>
       </p:bgPr>
     </p:bg>
     <p:spTree>
@@ -4461,11 +4355,11 @@
           <a:bodyPr wrap="square" lIns="0" tIns="0" rIns="0" bIns="0" rtlCol="0" anchor="ctr"/>
           <a:lstStyle/>
           <a:p>
-            <a:pPr indent="0" marL="0">
-              <a:buNone/>
-            </a:pPr>
-            <a:r>
-              <a:rPr lang="en-US" sz="1200" b="1" spc="300" kern="0" dirty="0">
+            <a:pPr marL="0" indent="0">
+              <a:buNone/>
+            </a:pPr>
+            <a:r>
+              <a:rPr lang="en-US" sz="1200" b="1" kern="0" spc="300" dirty="0">
                 <a:solidFill>
                   <a:srgbClr val="0B7A85"/>
                 </a:solidFill>
@@ -4500,7 +4394,7 @@
           <a:bodyPr wrap="square" lIns="0" tIns="0" rIns="0" bIns="0" rtlCol="0" anchor="t"/>
           <a:lstStyle/>
           <a:p>
-            <a:pPr indent="0" marL="0">
+            <a:pPr marL="0" indent="0">
               <a:buNone/>
             </a:pPr>
             <a:r>
@@ -4544,6 +4438,13 @@
             <a:prstDash val="solid"/>
           </a:ln>
         </p:spPr>
+        <p:txBody>
+          <a:bodyPr/>
+          <a:lstStyle/>
+          <a:p>
+            <a:endParaRPr lang="en-IN"/>
+          </a:p>
+        </p:txBody>
       </p:sp>
       <p:sp>
         <p:nvSpPr>
@@ -4566,7 +4467,7 @@
           <a:bodyPr wrap="square" lIns="0" tIns="0" rIns="0" bIns="0" rtlCol="0" anchor="ctr"/>
           <a:lstStyle/>
           <a:p>
-            <a:pPr algn="ctr" indent="0" marL="0">
+            <a:pPr marL="0" indent="0" algn="ctr">
               <a:buNone/>
             </a:pPr>
             <a:r>
@@ -4583,7 +4484,7 @@
             <a:endParaRPr lang="en-US" sz="1400" dirty="0"/>
           </a:p>
           <a:p>
-            <a:pPr algn="ctr" indent="0" marL="0">
+            <a:pPr marL="0" indent="0" algn="ctr">
               <a:buNone/>
             </a:pPr>
             <a:r>
@@ -4627,6 +4528,13 @@
             <a:prstDash val="solid"/>
           </a:ln>
         </p:spPr>
+        <p:txBody>
+          <a:bodyPr/>
+          <a:lstStyle/>
+          <a:p>
+            <a:endParaRPr lang="en-IN"/>
+          </a:p>
+        </p:txBody>
       </p:sp>
       <p:sp>
         <p:nvSpPr>
@@ -4649,7 +4557,7 @@
           <a:bodyPr wrap="square" lIns="0" tIns="0" rIns="0" bIns="0" rtlCol="0" anchor="ctr"/>
           <a:lstStyle/>
           <a:p>
-            <a:pPr algn="ctr" indent="0" marL="0">
+            <a:pPr marL="0" indent="0" algn="ctr">
               <a:buNone/>
             </a:pPr>
             <a:r>
@@ -4666,7 +4574,7 @@
             <a:endParaRPr lang="en-US" sz="1400" dirty="0"/>
           </a:p>
           <a:p>
-            <a:pPr algn="ctr" indent="0" marL="0">
+            <a:pPr marL="0" indent="0" algn="ctr">
               <a:buNone/>
             </a:pPr>
             <a:r>
@@ -4710,6 +4618,13 @@
             <a:prstDash val="solid"/>
           </a:ln>
         </p:spPr>
+        <p:txBody>
+          <a:bodyPr/>
+          <a:lstStyle/>
+          <a:p>
+            <a:endParaRPr lang="en-IN"/>
+          </a:p>
+        </p:txBody>
       </p:sp>
       <p:sp>
         <p:nvSpPr>
@@ -4732,7 +4647,7 @@
           <a:bodyPr wrap="square" lIns="0" tIns="0" rIns="0" bIns="0" rtlCol="0" anchor="ctr"/>
           <a:lstStyle/>
           <a:p>
-            <a:pPr algn="ctr" indent="0" marL="0">
+            <a:pPr marL="0" indent="0" algn="ctr">
               <a:buNone/>
             </a:pPr>
             <a:r>
@@ -4749,7 +4664,7 @@
             <a:endParaRPr lang="en-US" sz="1400" dirty="0"/>
           </a:p>
           <a:p>
-            <a:pPr algn="ctr" indent="0" marL="0">
+            <a:pPr marL="0" indent="0" algn="ctr">
               <a:buNone/>
             </a:pPr>
             <a:r>
@@ -4793,6 +4708,13 @@
             <a:prstDash val="solid"/>
           </a:ln>
         </p:spPr>
+        <p:txBody>
+          <a:bodyPr/>
+          <a:lstStyle/>
+          <a:p>
+            <a:endParaRPr lang="en-IN"/>
+          </a:p>
+        </p:txBody>
       </p:sp>
       <p:sp>
         <p:nvSpPr>
@@ -4815,7 +4737,7 @@
           <a:bodyPr wrap="square" lIns="0" tIns="0" rIns="0" bIns="0" rtlCol="0" anchor="ctr"/>
           <a:lstStyle/>
           <a:p>
-            <a:pPr algn="ctr" indent="0" marL="0">
+            <a:pPr marL="0" indent="0" algn="ctr">
               <a:buNone/>
             </a:pPr>
             <a:r>
@@ -4832,7 +4754,7 @@
             <a:endParaRPr lang="en-US" sz="1400" dirty="0"/>
           </a:p>
           <a:p>
-            <a:pPr algn="ctr" indent="0" marL="0">
+            <a:pPr marL="0" indent="0" algn="ctr">
               <a:buNone/>
             </a:pPr>
             <a:r>
@@ -4873,6 +4795,13 @@
             <a:tailEnd type="triangle"/>
           </a:ln>
         </p:spPr>
+        <p:txBody>
+          <a:bodyPr/>
+          <a:lstStyle/>
+          <a:p>
+            <a:endParaRPr lang="en-IN"/>
+          </a:p>
+        </p:txBody>
       </p:sp>
       <p:sp>
         <p:nvSpPr>
@@ -4897,6 +4826,13 @@
             <a:tailEnd type="triangle"/>
           </a:ln>
         </p:spPr>
+        <p:txBody>
+          <a:bodyPr/>
+          <a:lstStyle/>
+          <a:p>
+            <a:endParaRPr lang="en-IN"/>
+          </a:p>
+        </p:txBody>
       </p:sp>
       <p:sp>
         <p:nvSpPr>
@@ -4921,6 +4857,13 @@
             <a:tailEnd type="triangle"/>
           </a:ln>
         </p:spPr>
+        <p:txBody>
+          <a:bodyPr/>
+          <a:lstStyle/>
+          <a:p>
+            <a:endParaRPr lang="en-IN"/>
+          </a:p>
+        </p:txBody>
       </p:sp>
       <p:sp>
         <p:nvSpPr>
@@ -4948,6 +4891,13 @@
             <a:prstDash val="solid"/>
           </a:ln>
         </p:spPr>
+        <p:txBody>
+          <a:bodyPr/>
+          <a:lstStyle/>
+          <a:p>
+            <a:endParaRPr lang="en-IN"/>
+          </a:p>
+        </p:txBody>
       </p:sp>
       <p:sp>
         <p:nvSpPr>
@@ -4970,7 +4920,7 @@
           <a:bodyPr wrap="square" lIns="0" tIns="0" rIns="0" bIns="0" rtlCol="0" anchor="ctr"/>
           <a:lstStyle/>
           <a:p>
-            <a:pPr indent="0" marL="0">
+            <a:pPr marL="0" indent="0">
               <a:buNone/>
             </a:pPr>
             <a:r>
@@ -5009,7 +4959,7 @@
           <a:bodyPr wrap="square" lIns="0" tIns="0" rIns="0" bIns="0" rtlCol="0" anchor="t"/>
           <a:lstStyle/>
           <a:p>
-            <a:pPr indent="0" marL="0">
+            <a:pPr marL="0" indent="0">
               <a:buNone/>
             </a:pPr>
             <a:r>
@@ -5053,6 +5003,13 @@
             <a:prstDash val="solid"/>
           </a:ln>
         </p:spPr>
+        <p:txBody>
+          <a:bodyPr/>
+          <a:lstStyle/>
+          <a:p>
+            <a:endParaRPr lang="en-IN"/>
+          </a:p>
+        </p:txBody>
       </p:sp>
       <p:sp>
         <p:nvSpPr>
@@ -5075,7 +5032,7 @@
           <a:bodyPr wrap="square" lIns="0" tIns="0" rIns="0" bIns="0" rtlCol="0" anchor="ctr"/>
           <a:lstStyle/>
           <a:p>
-            <a:pPr indent="0" marL="0">
+            <a:pPr marL="0" indent="0">
               <a:buNone/>
             </a:pPr>
             <a:r>
@@ -5114,7 +5071,7 @@
           <a:bodyPr wrap="square" lIns="0" tIns="0" rIns="0" bIns="0" rtlCol="0" anchor="t"/>
           <a:lstStyle/>
           <a:p>
-            <a:pPr indent="0" marL="0">
+            <a:pPr marL="0" indent="0">
               <a:buNone/>
             </a:pPr>
             <a:r>
@@ -5148,6 +5105,7 @@
         <a:solidFill>
           <a:srgbClr val="FFFFFF"/>
         </a:solidFill>
+        <a:effectLst/>
       </p:bgPr>
     </p:bg>
     <p:spTree>
@@ -5185,11 +5143,11 @@
           <a:bodyPr wrap="square" lIns="0" tIns="0" rIns="0" bIns="0" rtlCol="0" anchor="ctr"/>
           <a:lstStyle/>
           <a:p>
-            <a:pPr indent="0" marL="0">
-              <a:buNone/>
-            </a:pPr>
-            <a:r>
-              <a:rPr lang="en-US" sz="1200" b="1" spc="300" kern="0" dirty="0">
+            <a:pPr marL="0" indent="0">
+              <a:buNone/>
+            </a:pPr>
+            <a:r>
+              <a:rPr lang="en-US" sz="1200" b="1" kern="0" spc="300" dirty="0">
                 <a:solidFill>
                   <a:srgbClr val="0B7A85"/>
                 </a:solidFill>
@@ -5224,7 +5182,7 @@
           <a:bodyPr wrap="square" lIns="0" tIns="0" rIns="0" bIns="0" rtlCol="0" anchor="t"/>
           <a:lstStyle/>
           <a:p>
-            <a:pPr indent="0" marL="0">
+            <a:pPr marL="0" indent="0">
               <a:buNone/>
             </a:pPr>
             <a:r>
@@ -5268,6 +5226,13 @@
             <a:prstDash val="solid"/>
           </a:ln>
         </p:spPr>
+        <p:txBody>
+          <a:bodyPr/>
+          <a:lstStyle/>
+          <a:p>
+            <a:endParaRPr lang="en-IN"/>
+          </a:p>
+        </p:txBody>
       </p:sp>
       <p:sp>
         <p:nvSpPr>
@@ -5295,6 +5260,13 @@
             <a:prstDash val="solid"/>
           </a:ln>
         </p:spPr>
+        <p:txBody>
+          <a:bodyPr/>
+          <a:lstStyle/>
+          <a:p>
+            <a:endParaRPr lang="en-IN"/>
+          </a:p>
+        </p:txBody>
       </p:sp>
       <p:sp>
         <p:nvSpPr>
@@ -5317,7 +5289,7 @@
           <a:bodyPr wrap="square" lIns="0" tIns="0" rIns="0" bIns="0" rtlCol="0" anchor="ctr"/>
           <a:lstStyle/>
           <a:p>
-            <a:pPr algn="ctr" indent="0" marL="0">
+            <a:pPr marL="0" indent="0" algn="ctr">
               <a:buNone/>
             </a:pPr>
             <a:r>
@@ -5356,7 +5328,7 @@
           <a:bodyPr wrap="square" lIns="0" tIns="0" rIns="0" bIns="0" rtlCol="0" anchor="t"/>
           <a:lstStyle/>
           <a:p>
-            <a:pPr indent="0" marL="0">
+            <a:pPr marL="0" indent="0">
               <a:buNone/>
             </a:pPr>
             <a:r>
@@ -5400,6 +5372,13 @@
             <a:prstDash val="solid"/>
           </a:ln>
         </p:spPr>
+        <p:txBody>
+          <a:bodyPr/>
+          <a:lstStyle/>
+          <a:p>
+            <a:endParaRPr lang="en-IN"/>
+          </a:p>
+        </p:txBody>
       </p:sp>
       <p:sp>
         <p:nvSpPr>
@@ -5427,6 +5406,13 @@
             <a:prstDash val="solid"/>
           </a:ln>
         </p:spPr>
+        <p:txBody>
+          <a:bodyPr/>
+          <a:lstStyle/>
+          <a:p>
+            <a:endParaRPr lang="en-IN"/>
+          </a:p>
+        </p:txBody>
       </p:sp>
       <p:sp>
         <p:nvSpPr>
@@ -5449,7 +5435,7 @@
           <a:bodyPr wrap="square" lIns="0" tIns="0" rIns="0" bIns="0" rtlCol="0" anchor="ctr"/>
           <a:lstStyle/>
           <a:p>
-            <a:pPr algn="ctr" indent="0" marL="0">
+            <a:pPr marL="0" indent="0" algn="ctr">
               <a:buNone/>
             </a:pPr>
             <a:r>
@@ -5488,7 +5474,7 @@
           <a:bodyPr wrap="square" lIns="0" tIns="0" rIns="0" bIns="0" rtlCol="0" anchor="t"/>
           <a:lstStyle/>
           <a:p>
-            <a:pPr indent="0" marL="0">
+            <a:pPr marL="0" indent="0">
               <a:buNone/>
             </a:pPr>
             <a:r>
@@ -5532,6 +5518,13 @@
             <a:prstDash val="solid"/>
           </a:ln>
         </p:spPr>
+        <p:txBody>
+          <a:bodyPr/>
+          <a:lstStyle/>
+          <a:p>
+            <a:endParaRPr lang="en-IN"/>
+          </a:p>
+        </p:txBody>
       </p:sp>
       <p:sp>
         <p:nvSpPr>
@@ -5559,6 +5552,13 @@
             <a:prstDash val="solid"/>
           </a:ln>
         </p:spPr>
+        <p:txBody>
+          <a:bodyPr/>
+          <a:lstStyle/>
+          <a:p>
+            <a:endParaRPr lang="en-IN"/>
+          </a:p>
+        </p:txBody>
       </p:sp>
       <p:sp>
         <p:nvSpPr>
@@ -5581,7 +5581,7 @@
           <a:bodyPr wrap="square" lIns="0" tIns="0" rIns="0" bIns="0" rtlCol="0" anchor="ctr"/>
           <a:lstStyle/>
           <a:p>
-            <a:pPr algn="ctr" indent="0" marL="0">
+            <a:pPr marL="0" indent="0" algn="ctr">
               <a:buNone/>
             </a:pPr>
             <a:r>
@@ -5620,7 +5620,7 @@
           <a:bodyPr wrap="square" lIns="0" tIns="0" rIns="0" bIns="0" rtlCol="0" anchor="t"/>
           <a:lstStyle/>
           <a:p>
-            <a:pPr indent="0" marL="0">
+            <a:pPr marL="0" indent="0">
               <a:buNone/>
             </a:pPr>
             <a:r>
@@ -5664,6 +5664,13 @@
             <a:prstDash val="solid"/>
           </a:ln>
         </p:spPr>
+        <p:txBody>
+          <a:bodyPr/>
+          <a:lstStyle/>
+          <a:p>
+            <a:endParaRPr lang="en-IN"/>
+          </a:p>
+        </p:txBody>
       </p:sp>
       <p:sp>
         <p:nvSpPr>
@@ -5691,6 +5698,13 @@
             <a:prstDash val="solid"/>
           </a:ln>
         </p:spPr>
+        <p:txBody>
+          <a:bodyPr/>
+          <a:lstStyle/>
+          <a:p>
+            <a:endParaRPr lang="en-IN"/>
+          </a:p>
+        </p:txBody>
       </p:sp>
       <p:sp>
         <p:nvSpPr>
@@ -5713,7 +5727,7 @@
           <a:bodyPr wrap="square" lIns="0" tIns="0" rIns="0" bIns="0" rtlCol="0" anchor="ctr"/>
           <a:lstStyle/>
           <a:p>
-            <a:pPr algn="ctr" indent="0" marL="0">
+            <a:pPr marL="0" indent="0" algn="ctr">
               <a:buNone/>
             </a:pPr>
             <a:r>
@@ -5752,7 +5766,7 @@
           <a:bodyPr wrap="square" lIns="0" tIns="0" rIns="0" bIns="0" rtlCol="0" anchor="t"/>
           <a:lstStyle/>
           <a:p>
-            <a:pPr indent="0" marL="0">
+            <a:pPr marL="0" indent="0">
               <a:buNone/>
             </a:pPr>
             <a:r>
@@ -5796,6 +5810,13 @@
             <a:prstDash val="solid"/>
           </a:ln>
         </p:spPr>
+        <p:txBody>
+          <a:bodyPr/>
+          <a:lstStyle/>
+          <a:p>
+            <a:endParaRPr lang="en-IN"/>
+          </a:p>
+        </p:txBody>
       </p:sp>
       <p:sp>
         <p:nvSpPr>
@@ -5823,6 +5844,13 @@
             <a:prstDash val="solid"/>
           </a:ln>
         </p:spPr>
+        <p:txBody>
+          <a:bodyPr/>
+          <a:lstStyle/>
+          <a:p>
+            <a:endParaRPr lang="en-IN"/>
+          </a:p>
+        </p:txBody>
       </p:sp>
       <p:sp>
         <p:nvSpPr>
@@ -5845,7 +5873,7 @@
           <a:bodyPr wrap="square" lIns="0" tIns="0" rIns="0" bIns="0" rtlCol="0" anchor="ctr"/>
           <a:lstStyle/>
           <a:p>
-            <a:pPr algn="ctr" indent="0" marL="0">
+            <a:pPr marL="0" indent="0" algn="ctr">
               <a:buNone/>
             </a:pPr>
             <a:r>
@@ -5884,7 +5912,7 @@
           <a:bodyPr wrap="square" lIns="0" tIns="0" rIns="0" bIns="0" rtlCol="0" anchor="t"/>
           <a:lstStyle/>
           <a:p>
-            <a:pPr indent="0" marL="0">
+            <a:pPr marL="0" indent="0">
               <a:buNone/>
             </a:pPr>
             <a:r>
@@ -5928,6 +5956,13 @@
             <a:prstDash val="solid"/>
           </a:ln>
         </p:spPr>
+        <p:txBody>
+          <a:bodyPr/>
+          <a:lstStyle/>
+          <a:p>
+            <a:endParaRPr lang="en-IN"/>
+          </a:p>
+        </p:txBody>
       </p:sp>
       <p:sp>
         <p:nvSpPr>
@@ -5955,6 +5990,13 @@
             <a:prstDash val="solid"/>
           </a:ln>
         </p:spPr>
+        <p:txBody>
+          <a:bodyPr/>
+          <a:lstStyle/>
+          <a:p>
+            <a:endParaRPr lang="en-IN"/>
+          </a:p>
+        </p:txBody>
       </p:sp>
       <p:sp>
         <p:nvSpPr>
@@ -5977,7 +6019,7 @@
           <a:bodyPr wrap="square" lIns="0" tIns="0" rIns="0" bIns="0" rtlCol="0" anchor="ctr"/>
           <a:lstStyle/>
           <a:p>
-            <a:pPr algn="ctr" indent="0" marL="0">
+            <a:pPr marL="0" indent="0" algn="ctr">
               <a:buNone/>
             </a:pPr>
             <a:r>
@@ -6016,7 +6058,7 @@
           <a:bodyPr wrap="square" lIns="0" tIns="0" rIns="0" bIns="0" rtlCol="0" anchor="t"/>
           <a:lstStyle/>
           <a:p>
-            <a:pPr indent="0" marL="0">
+            <a:pPr marL="0" indent="0">
               <a:buNone/>
             </a:pPr>
             <a:r>
@@ -6050,6 +6092,7 @@
         <a:solidFill>
           <a:srgbClr val="FFFFFF"/>
         </a:solidFill>
+        <a:effectLst/>
       </p:bgPr>
     </p:bg>
     <p:spTree>
@@ -6087,11 +6130,11 @@
           <a:bodyPr wrap="square" lIns="0" tIns="0" rIns="0" bIns="0" rtlCol="0" anchor="ctr"/>
           <a:lstStyle/>
           <a:p>
-            <a:pPr indent="0" marL="0">
-              <a:buNone/>
-            </a:pPr>
-            <a:r>
-              <a:rPr lang="en-US" sz="1200" b="1" spc="300" kern="0" dirty="0">
+            <a:pPr marL="0" indent="0">
+              <a:buNone/>
+            </a:pPr>
+            <a:r>
+              <a:rPr lang="en-US" sz="1200" b="1" kern="0" spc="300" dirty="0">
                 <a:solidFill>
                   <a:srgbClr val="0B7A85"/>
                 </a:solidFill>
@@ -6126,7 +6169,7 @@
           <a:bodyPr wrap="square" lIns="0" tIns="0" rIns="0" bIns="0" rtlCol="0" anchor="t"/>
           <a:lstStyle/>
           <a:p>
-            <a:pPr indent="0" marL="0">
+            <a:pPr marL="0" indent="0">
               <a:buNone/>
             </a:pPr>
             <a:r>
@@ -6170,6 +6213,13 @@
             <a:prstDash val="solid"/>
           </a:ln>
         </p:spPr>
+        <p:txBody>
+          <a:bodyPr/>
+          <a:lstStyle/>
+          <a:p>
+            <a:endParaRPr lang="en-IN"/>
+          </a:p>
+        </p:txBody>
       </p:sp>
       <p:sp>
         <p:nvSpPr>
@@ -6192,7 +6242,7 @@
           <a:bodyPr wrap="square" lIns="0" tIns="0" rIns="0" bIns="0" rtlCol="0" anchor="ctr"/>
           <a:lstStyle/>
           <a:p>
-            <a:pPr algn="ctr" indent="0" marL="0">
+            <a:pPr marL="0" indent="0" algn="ctr">
               <a:buNone/>
             </a:pPr>
             <a:r>
@@ -6231,7 +6281,7 @@
           <a:bodyPr wrap="square" lIns="0" tIns="0" rIns="0" bIns="0" rtlCol="0" anchor="t"/>
           <a:lstStyle/>
           <a:p>
-            <a:pPr algn="ctr" indent="0" marL="0">
+            <a:pPr marL="0" indent="0" algn="ctr">
               <a:buNone/>
             </a:pPr>
             <a:r>
@@ -6275,6 +6325,13 @@
             <a:prstDash val="solid"/>
           </a:ln>
         </p:spPr>
+        <p:txBody>
+          <a:bodyPr/>
+          <a:lstStyle/>
+          <a:p>
+            <a:endParaRPr lang="en-IN"/>
+          </a:p>
+        </p:txBody>
       </p:sp>
       <p:sp>
         <p:nvSpPr>
@@ -6297,7 +6354,7 @@
           <a:bodyPr wrap="square" lIns="0" tIns="0" rIns="0" bIns="0" rtlCol="0" anchor="ctr"/>
           <a:lstStyle/>
           <a:p>
-            <a:pPr algn="ctr" indent="0" marL="0">
+            <a:pPr marL="0" indent="0" algn="ctr">
               <a:buNone/>
             </a:pPr>
             <a:r>
@@ -6336,7 +6393,7 @@
           <a:bodyPr wrap="square" lIns="0" tIns="0" rIns="0" bIns="0" rtlCol="0" anchor="t"/>
           <a:lstStyle/>
           <a:p>
-            <a:pPr algn="ctr" indent="0" marL="0">
+            <a:pPr marL="0" indent="0" algn="ctr">
               <a:buNone/>
             </a:pPr>
             <a:r>
@@ -6380,6 +6437,13 @@
             <a:prstDash val="solid"/>
           </a:ln>
         </p:spPr>
+        <p:txBody>
+          <a:bodyPr/>
+          <a:lstStyle/>
+          <a:p>
+            <a:endParaRPr lang="en-IN"/>
+          </a:p>
+        </p:txBody>
       </p:sp>
       <p:sp>
         <p:nvSpPr>
@@ -6402,7 +6466,7 @@
           <a:bodyPr wrap="square" lIns="0" tIns="0" rIns="0" bIns="0" rtlCol="0" anchor="ctr"/>
           <a:lstStyle/>
           <a:p>
-            <a:pPr algn="ctr" indent="0" marL="0">
+            <a:pPr marL="0" indent="0" algn="ctr">
               <a:buNone/>
             </a:pPr>
             <a:r>
@@ -6441,7 +6505,7 @@
           <a:bodyPr wrap="square" lIns="0" tIns="0" rIns="0" bIns="0" rtlCol="0" anchor="t"/>
           <a:lstStyle/>
           <a:p>
-            <a:pPr algn="ctr" indent="0" marL="0">
+            <a:pPr marL="0" indent="0" algn="ctr">
               <a:buNone/>
             </a:pPr>
             <a:r>
@@ -6485,6 +6549,13 @@
             <a:prstDash val="solid"/>
           </a:ln>
         </p:spPr>
+        <p:txBody>
+          <a:bodyPr/>
+          <a:lstStyle/>
+          <a:p>
+            <a:endParaRPr lang="en-IN"/>
+          </a:p>
+        </p:txBody>
       </p:sp>
       <p:sp>
         <p:nvSpPr>
@@ -6507,7 +6578,7 @@
           <a:bodyPr wrap="square" lIns="0" tIns="0" rIns="0" bIns="0" rtlCol="0" anchor="ctr"/>
           <a:lstStyle/>
           <a:p>
-            <a:pPr algn="ctr" indent="0" marL="0">
+            <a:pPr marL="0" indent="0" algn="ctr">
               <a:buNone/>
             </a:pPr>
             <a:r>
@@ -6546,7 +6617,7 @@
           <a:bodyPr wrap="square" lIns="0" tIns="0" rIns="0" bIns="0" rtlCol="0" anchor="t"/>
           <a:lstStyle/>
           <a:p>
-            <a:pPr algn="ctr" indent="0" marL="0">
+            <a:pPr marL="0" indent="0" algn="ctr">
               <a:buNone/>
             </a:pPr>
             <a:r>
@@ -6590,6 +6661,13 @@
             <a:prstDash val="solid"/>
           </a:ln>
         </p:spPr>
+        <p:txBody>
+          <a:bodyPr/>
+          <a:lstStyle/>
+          <a:p>
+            <a:endParaRPr lang="en-IN"/>
+          </a:p>
+        </p:txBody>
       </p:sp>
       <p:sp>
         <p:nvSpPr>
@@ -6612,7 +6690,7 @@
           <a:bodyPr wrap="square" lIns="0" tIns="0" rIns="0" bIns="0" rtlCol="0" anchor="ctr"/>
           <a:lstStyle/>
           <a:p>
-            <a:pPr indent="0" marL="0">
+            <a:pPr marL="0" indent="0">
               <a:buNone/>
             </a:pPr>
             <a:r>
@@ -6651,7 +6729,7 @@
           <a:bodyPr wrap="square" lIns="0" tIns="0" rIns="0" bIns="0" rtlCol="0" anchor="t"/>
           <a:lstStyle/>
           <a:p>
-            <a:pPr indent="0" marL="0">
+            <a:pPr marL="0" indent="0">
               <a:buNone/>
             </a:pPr>
             <a:r>
@@ -6668,7 +6746,7 @@
             <a:endParaRPr lang="en-US" sz="1300" dirty="0"/>
           </a:p>
           <a:p>
-            <a:pPr indent="0" marL="0">
+            <a:pPr marL="0" indent="0">
               <a:buNone/>
             </a:pPr>
             <a:r>
@@ -6685,7 +6763,7 @@
             <a:endParaRPr lang="en-US" sz="1300" dirty="0"/>
           </a:p>
           <a:p>
-            <a:pPr indent="0" marL="0">
+            <a:pPr marL="0" indent="0">
               <a:buNone/>
             </a:pPr>
             <a:r>
@@ -6702,7 +6780,7 @@
             <a:endParaRPr lang="en-US" sz="1300" dirty="0"/>
           </a:p>
           <a:p>
-            <a:pPr indent="0" marL="0">
+            <a:pPr marL="0" indent="0">
               <a:buNone/>
             </a:pPr>
             <a:r>
@@ -6746,6 +6824,13 @@
             <a:prstDash val="solid"/>
           </a:ln>
         </p:spPr>
+        <p:txBody>
+          <a:bodyPr/>
+          <a:lstStyle/>
+          <a:p>
+            <a:endParaRPr lang="en-IN"/>
+          </a:p>
+        </p:txBody>
       </p:sp>
       <p:sp>
         <p:nvSpPr>
@@ -6768,7 +6853,7 @@
           <a:bodyPr wrap="square" lIns="0" tIns="0" rIns="0" bIns="0" rtlCol="0" anchor="ctr"/>
           <a:lstStyle/>
           <a:p>
-            <a:pPr indent="0" marL="0">
+            <a:pPr marL="0" indent="0">
               <a:buNone/>
             </a:pPr>
             <a:r>
@@ -6807,7 +6892,7 @@
           <a:bodyPr wrap="square" lIns="0" tIns="0" rIns="0" bIns="0" rtlCol="0" anchor="t"/>
           <a:lstStyle/>
           <a:p>
-            <a:pPr indent="0" marL="0">
+            <a:pPr marL="0" indent="0">
               <a:buNone/>
             </a:pPr>
             <a:r>
@@ -6824,7 +6909,7 @@
             <a:endParaRPr lang="en-US" sz="1300" dirty="0"/>
           </a:p>
           <a:p>
-            <a:pPr indent="0" marL="0">
+            <a:pPr marL="0" indent="0">
               <a:buNone/>
             </a:pPr>
             <a:r>
@@ -6841,7 +6926,7 @@
             <a:endParaRPr lang="en-US" sz="1300" dirty="0"/>
           </a:p>
           <a:p>
-            <a:pPr indent="0" marL="0">
+            <a:pPr marL="0" indent="0">
               <a:buNone/>
             </a:pPr>
             <a:r>
@@ -6858,7 +6943,7 @@
             <a:endParaRPr lang="en-US" sz="1300" dirty="0"/>
           </a:p>
           <a:p>
-            <a:pPr indent="0" marL="0">
+            <a:pPr marL="0" indent="0">
               <a:buNone/>
             </a:pPr>
             <a:r>
@@ -6892,6 +6977,7 @@
         <a:solidFill>
           <a:srgbClr val="14213D"/>
         </a:solidFill>
+        <a:effectLst/>
       </p:bgPr>
     </p:bg>
     <p:spTree>
@@ -6929,7 +7015,7 @@
           <a:bodyPr wrap="square" lIns="0" tIns="0" rIns="0" bIns="0" rtlCol="0" anchor="ctr"/>
           <a:lstStyle/>
           <a:p>
-            <a:pPr indent="0" marL="0">
+            <a:pPr marL="0" indent="0">
               <a:buNone/>
             </a:pPr>
             <a:r>
@@ -7053,7 +7139,7 @@
           <a:bodyPr wrap="square" lIns="0" tIns="0" rIns="0" bIns="0" rtlCol="0" anchor="ctr"/>
           <a:lstStyle/>
           <a:p>
-            <a:pPr indent="0" marL="0">
+            <a:pPr marL="0" indent="0">
               <a:buNone/>
             </a:pPr>
             <a:r>
@@ -7087,6 +7173,7 @@
         <a:solidFill>
           <a:srgbClr val="FFFFFF"/>
         </a:solidFill>
+        <a:effectLst/>
       </p:bgPr>
     </p:bg>
     <p:spTree>
@@ -7124,11 +7211,11 @@
           <a:bodyPr wrap="square" lIns="0" tIns="0" rIns="0" bIns="0" rtlCol="0" anchor="ctr"/>
           <a:lstStyle/>
           <a:p>
-            <a:pPr indent="0" marL="0">
-              <a:buNone/>
-            </a:pPr>
-            <a:r>
-              <a:rPr lang="en-US" sz="1200" b="1" spc="300" kern="0" dirty="0">
+            <a:pPr marL="0" indent="0">
+              <a:buNone/>
+            </a:pPr>
+            <a:r>
+              <a:rPr lang="en-US" sz="1200" b="1" kern="0" spc="300" dirty="0">
                 <a:solidFill>
                   <a:srgbClr val="0B7A85"/>
                 </a:solidFill>
@@ -7163,7 +7250,7 @@
           <a:bodyPr wrap="square" lIns="0" tIns="0" rIns="0" bIns="0" rtlCol="0" anchor="t"/>
           <a:lstStyle/>
           <a:p>
-            <a:pPr indent="0" marL="0">
+            <a:pPr marL="0" indent="0">
               <a:buNone/>
             </a:pPr>
             <a:r>
@@ -7207,6 +7294,13 @@
             <a:prstDash val="solid"/>
           </a:ln>
         </p:spPr>
+        <p:txBody>
+          <a:bodyPr/>
+          <a:lstStyle/>
+          <a:p>
+            <a:endParaRPr lang="en-IN"/>
+          </a:p>
+        </p:txBody>
       </p:sp>
       <p:sp>
         <p:nvSpPr>
@@ -7229,7 +7323,7 @@
           <a:bodyPr wrap="square" lIns="0" tIns="0" rIns="0" bIns="0" rtlCol="0" anchor="ctr"/>
           <a:lstStyle/>
           <a:p>
-            <a:pPr indent="0" marL="0">
+            <a:pPr marL="0" indent="0">
               <a:buNone/>
             </a:pPr>
             <a:r>
@@ -7268,7 +7362,7 @@
           <a:bodyPr wrap="square" lIns="0" tIns="0" rIns="0" bIns="0" rtlCol="0" anchor="t"/>
           <a:lstStyle/>
           <a:p>
-            <a:pPr indent="0" marL="0">
+            <a:pPr marL="0" indent="0">
               <a:buNone/>
             </a:pPr>
             <a:r>
@@ -7312,6 +7406,13 @@
             <a:prstDash val="solid"/>
           </a:ln>
         </p:spPr>
+        <p:txBody>
+          <a:bodyPr/>
+          <a:lstStyle/>
+          <a:p>
+            <a:endParaRPr lang="en-IN"/>
+          </a:p>
+        </p:txBody>
       </p:sp>
       <p:sp>
         <p:nvSpPr>
@@ -7334,7 +7435,7 @@
           <a:bodyPr wrap="square" lIns="0" tIns="0" rIns="0" bIns="0" rtlCol="0" anchor="ctr"/>
           <a:lstStyle/>
           <a:p>
-            <a:pPr indent="0" marL="0">
+            <a:pPr marL="0" indent="0">
               <a:buNone/>
             </a:pPr>
             <a:r>
@@ -7373,7 +7474,7 @@
           <a:bodyPr wrap="square" lIns="0" tIns="0" rIns="0" bIns="0" rtlCol="0" anchor="t"/>
           <a:lstStyle/>
           <a:p>
-            <a:pPr indent="0" marL="0">
+            <a:pPr marL="0" indent="0">
               <a:buNone/>
             </a:pPr>
             <a:r>
@@ -7417,6 +7518,13 @@
             <a:prstDash val="solid"/>
           </a:ln>
         </p:spPr>
+        <p:txBody>
+          <a:bodyPr/>
+          <a:lstStyle/>
+          <a:p>
+            <a:endParaRPr lang="en-IN"/>
+          </a:p>
+        </p:txBody>
       </p:sp>
       <p:sp>
         <p:nvSpPr>
@@ -7439,7 +7547,7 @@
           <a:bodyPr wrap="square" lIns="0" tIns="0" rIns="0" bIns="0" rtlCol="0" anchor="ctr"/>
           <a:lstStyle/>
           <a:p>
-            <a:pPr indent="0" marL="0">
+            <a:pPr marL="0" indent="0">
               <a:buNone/>
             </a:pPr>
             <a:r>
@@ -7478,7 +7586,7 @@
           <a:bodyPr wrap="square" lIns="0" tIns="0" rIns="0" bIns="0" rtlCol="0" anchor="t"/>
           <a:lstStyle/>
           <a:p>
-            <a:pPr indent="0" marL="0">
+            <a:pPr marL="0" indent="0">
               <a:buNone/>
             </a:pPr>
             <a:r>
@@ -7522,6 +7630,13 @@
             <a:prstDash val="solid"/>
           </a:ln>
         </p:spPr>
+        <p:txBody>
+          <a:bodyPr/>
+          <a:lstStyle/>
+          <a:p>
+            <a:endParaRPr lang="en-IN"/>
+          </a:p>
+        </p:txBody>
       </p:sp>
       <p:sp>
         <p:nvSpPr>
@@ -7544,7 +7659,7 @@
           <a:bodyPr wrap="square" lIns="0" tIns="0" rIns="0" bIns="0" rtlCol="0" anchor="ctr"/>
           <a:lstStyle/>
           <a:p>
-            <a:pPr indent="0" marL="0">
+            <a:pPr marL="0" indent="0">
               <a:buNone/>
             </a:pPr>
             <a:r>
@@ -7583,7 +7698,7 @@
           <a:bodyPr wrap="square" lIns="0" tIns="0" rIns="0" bIns="0" rtlCol="0" anchor="t"/>
           <a:lstStyle/>
           <a:p>
-            <a:pPr indent="0" marL="0">
+            <a:pPr marL="0" indent="0">
               <a:buNone/>
             </a:pPr>
             <a:r>
@@ -7617,6 +7732,7 @@
         <a:solidFill>
           <a:srgbClr val="FFFFFF"/>
         </a:solidFill>
+        <a:effectLst/>
       </p:bgPr>
     </p:bg>
     <p:spTree>
@@ -7654,11 +7770,11 @@
           <a:bodyPr wrap="square" lIns="0" tIns="0" rIns="0" bIns="0" rtlCol="0" anchor="ctr"/>
           <a:lstStyle/>
           <a:p>
-            <a:pPr indent="0" marL="0">
-              <a:buNone/>
-            </a:pPr>
-            <a:r>
-              <a:rPr lang="en-US" sz="1200" b="1" spc="300" kern="0" dirty="0">
+            <a:pPr marL="0" indent="0">
+              <a:buNone/>
+            </a:pPr>
+            <a:r>
+              <a:rPr lang="en-US" sz="1200" b="1" kern="0" spc="300" dirty="0">
                 <a:solidFill>
                   <a:srgbClr val="0B7A85"/>
                 </a:solidFill>
@@ -7693,7 +7809,7 @@
           <a:bodyPr wrap="square" lIns="0" tIns="0" rIns="0" bIns="0" rtlCol="0" anchor="t"/>
           <a:lstStyle/>
           <a:p>
-            <a:pPr indent="0" marL="0">
+            <a:pPr marL="0" indent="0">
               <a:buNone/>
             </a:pPr>
             <a:r>
@@ -7737,6 +7853,13 @@
             <a:prstDash val="solid"/>
           </a:ln>
         </p:spPr>
+        <p:txBody>
+          <a:bodyPr/>
+          <a:lstStyle/>
+          <a:p>
+            <a:endParaRPr lang="en-IN"/>
+          </a:p>
+        </p:txBody>
       </p:sp>
       <p:sp>
         <p:nvSpPr>
@@ -7759,7 +7882,7 @@
           <a:bodyPr wrap="square" lIns="0" tIns="0" rIns="0" bIns="0" rtlCol="0" anchor="ctr"/>
           <a:lstStyle/>
           <a:p>
-            <a:pPr algn="ctr" indent="0" marL="0">
+            <a:pPr marL="0" indent="0" algn="ctr">
               <a:buNone/>
             </a:pPr>
             <a:r>
@@ -7776,7 +7899,7 @@
             <a:endParaRPr lang="en-US" sz="1400" dirty="0"/>
           </a:p>
           <a:p>
-            <a:pPr algn="ctr" indent="0" marL="0">
+            <a:pPr marL="0" indent="0" algn="ctr">
               <a:buNone/>
             </a:pPr>
             <a:r>
@@ -7817,6 +7940,13 @@
             <a:tailEnd type="triangle"/>
           </a:ln>
         </p:spPr>
+        <p:txBody>
+          <a:bodyPr/>
+          <a:lstStyle/>
+          <a:p>
+            <a:endParaRPr lang="en-IN"/>
+          </a:p>
+        </p:txBody>
       </p:sp>
       <p:sp>
         <p:nvSpPr>
@@ -7844,6 +7974,13 @@
             <a:prstDash val="solid"/>
           </a:ln>
         </p:spPr>
+        <p:txBody>
+          <a:bodyPr/>
+          <a:lstStyle/>
+          <a:p>
+            <a:endParaRPr lang="en-IN"/>
+          </a:p>
+        </p:txBody>
       </p:sp>
       <p:sp>
         <p:nvSpPr>
@@ -7866,7 +8003,7 @@
           <a:bodyPr wrap="square" lIns="0" tIns="0" rIns="0" bIns="0" rtlCol="0" anchor="ctr"/>
           <a:lstStyle/>
           <a:p>
-            <a:pPr algn="ctr" indent="0" marL="0">
+            <a:pPr marL="0" indent="0" algn="ctr">
               <a:buNone/>
             </a:pPr>
             <a:r>
@@ -7883,7 +8020,7 @@
             <a:endParaRPr lang="en-US" sz="1400" dirty="0"/>
           </a:p>
           <a:p>
-            <a:pPr algn="ctr" indent="0" marL="0">
+            <a:pPr marL="0" indent="0" algn="ctr">
               <a:buNone/>
             </a:pPr>
             <a:r>
@@ -7924,6 +8061,13 @@
             <a:tailEnd type="triangle"/>
           </a:ln>
         </p:spPr>
+        <p:txBody>
+          <a:bodyPr/>
+          <a:lstStyle/>
+          <a:p>
+            <a:endParaRPr lang="en-IN"/>
+          </a:p>
+        </p:txBody>
       </p:sp>
       <p:sp>
         <p:nvSpPr>
@@ -7951,6 +8095,13 @@
             <a:prstDash val="solid"/>
           </a:ln>
         </p:spPr>
+        <p:txBody>
+          <a:bodyPr/>
+          <a:lstStyle/>
+          <a:p>
+            <a:endParaRPr lang="en-IN"/>
+          </a:p>
+        </p:txBody>
       </p:sp>
       <p:sp>
         <p:nvSpPr>
@@ -7973,7 +8124,7 @@
           <a:bodyPr wrap="square" lIns="0" tIns="0" rIns="0" bIns="0" rtlCol="0" anchor="ctr"/>
           <a:lstStyle/>
           <a:p>
-            <a:pPr algn="ctr" indent="0" marL="0">
+            <a:pPr marL="0" indent="0" algn="ctr">
               <a:buNone/>
             </a:pPr>
             <a:r>
@@ -7990,7 +8141,7 @@
             <a:endParaRPr lang="en-US" sz="1400" dirty="0"/>
           </a:p>
           <a:p>
-            <a:pPr algn="ctr" indent="0" marL="0">
+            <a:pPr marL="0" indent="0" algn="ctr">
               <a:buNone/>
             </a:pPr>
             <a:r>
@@ -8031,6 +8182,13 @@
             <a:tailEnd type="triangle"/>
           </a:ln>
         </p:spPr>
+        <p:txBody>
+          <a:bodyPr/>
+          <a:lstStyle/>
+          <a:p>
+            <a:endParaRPr lang="en-IN"/>
+          </a:p>
+        </p:txBody>
       </p:sp>
       <p:sp>
         <p:nvSpPr>
@@ -8058,6 +8216,13 @@
             <a:prstDash val="solid"/>
           </a:ln>
         </p:spPr>
+        <p:txBody>
+          <a:bodyPr/>
+          <a:lstStyle/>
+          <a:p>
+            <a:endParaRPr lang="en-IN"/>
+          </a:p>
+        </p:txBody>
       </p:sp>
       <p:sp>
         <p:nvSpPr>
@@ -8080,7 +8245,7 @@
           <a:bodyPr wrap="square" lIns="0" tIns="0" rIns="0" bIns="0" rtlCol="0" anchor="ctr"/>
           <a:lstStyle/>
           <a:p>
-            <a:pPr algn="ctr" indent="0" marL="0">
+            <a:pPr marL="0" indent="0" algn="ctr">
               <a:buNone/>
             </a:pPr>
             <a:r>
@@ -8097,7 +8262,7 @@
             <a:endParaRPr lang="en-US" sz="1400" dirty="0"/>
           </a:p>
           <a:p>
-            <a:pPr algn="ctr" indent="0" marL="0">
+            <a:pPr marL="0" indent="0" algn="ctr">
               <a:buNone/>
             </a:pPr>
             <a:r>
@@ -8138,6 +8303,13 @@
             <a:tailEnd type="triangle"/>
           </a:ln>
         </p:spPr>
+        <p:txBody>
+          <a:bodyPr/>
+          <a:lstStyle/>
+          <a:p>
+            <a:endParaRPr lang="en-IN"/>
+          </a:p>
+        </p:txBody>
       </p:sp>
       <p:sp>
         <p:nvSpPr>
@@ -8165,6 +8337,13 @@
             <a:prstDash val="solid"/>
           </a:ln>
         </p:spPr>
+        <p:txBody>
+          <a:bodyPr/>
+          <a:lstStyle/>
+          <a:p>
+            <a:endParaRPr lang="en-IN"/>
+          </a:p>
+        </p:txBody>
       </p:sp>
       <p:sp>
         <p:nvSpPr>
@@ -8187,7 +8366,7 @@
           <a:bodyPr wrap="square" lIns="0" tIns="0" rIns="0" bIns="0" rtlCol="0" anchor="ctr"/>
           <a:lstStyle/>
           <a:p>
-            <a:pPr algn="ctr" indent="0" marL="0">
+            <a:pPr marL="0" indent="0" algn="ctr">
               <a:buNone/>
             </a:pPr>
             <a:r>
@@ -8204,7 +8383,7 @@
             <a:endParaRPr lang="en-US" sz="1400" dirty="0"/>
           </a:p>
           <a:p>
-            <a:pPr algn="ctr" indent="0" marL="0">
+            <a:pPr marL="0" indent="0" algn="ctr">
               <a:buNone/>
             </a:pPr>
             <a:r>
@@ -8243,7 +8422,7 @@
           <a:bodyPr wrap="square" lIns="0" tIns="0" rIns="0" bIns="0" rtlCol="0" anchor="ctr"/>
           <a:lstStyle/>
           <a:p>
-            <a:pPr indent="0" marL="0">
+            <a:pPr marL="0" indent="0">
               <a:buNone/>
             </a:pPr>
             <a:r>
@@ -8287,6 +8466,13 @@
             <a:prstDash val="solid"/>
           </a:ln>
         </p:spPr>
+        <p:txBody>
+          <a:bodyPr/>
+          <a:lstStyle/>
+          <a:p>
+            <a:endParaRPr lang="en-IN"/>
+          </a:p>
+        </p:txBody>
       </p:sp>
       <p:sp>
         <p:nvSpPr>
@@ -8309,7 +8495,7 @@
           <a:bodyPr wrap="square" lIns="0" tIns="0" rIns="0" bIns="0" rtlCol="0" anchor="ctr"/>
           <a:lstStyle/>
           <a:p>
-            <a:pPr indent="0" marL="0">
+            <a:pPr marL="0" indent="0">
               <a:buNone/>
             </a:pPr>
             <a:r>
@@ -8348,7 +8534,7 @@
           <a:bodyPr wrap="square" lIns="0" tIns="0" rIns="0" bIns="0" rtlCol="0" anchor="t"/>
           <a:lstStyle/>
           <a:p>
-            <a:pPr indent="0" marL="0">
+            <a:pPr marL="0" indent="0">
               <a:buNone/>
             </a:pPr>
             <a:r>
@@ -8392,6 +8578,13 @@
             <a:prstDash val="solid"/>
           </a:ln>
         </p:spPr>
+        <p:txBody>
+          <a:bodyPr/>
+          <a:lstStyle/>
+          <a:p>
+            <a:endParaRPr lang="en-IN"/>
+          </a:p>
+        </p:txBody>
       </p:sp>
       <p:sp>
         <p:nvSpPr>
@@ -8414,7 +8607,7 @@
           <a:bodyPr wrap="square" lIns="0" tIns="0" rIns="0" bIns="0" rtlCol="0" anchor="ctr"/>
           <a:lstStyle/>
           <a:p>
-            <a:pPr indent="0" marL="0">
+            <a:pPr marL="0" indent="0">
               <a:buNone/>
             </a:pPr>
             <a:r>
@@ -8453,7 +8646,7 @@
           <a:bodyPr wrap="square" lIns="0" tIns="0" rIns="0" bIns="0" rtlCol="0" anchor="t"/>
           <a:lstStyle/>
           <a:p>
-            <a:pPr indent="0" marL="0">
+            <a:pPr marL="0" indent="0">
               <a:buNone/>
             </a:pPr>
             <a:r>
@@ -8497,6 +8690,13 @@
             <a:prstDash val="solid"/>
           </a:ln>
         </p:spPr>
+        <p:txBody>
+          <a:bodyPr/>
+          <a:lstStyle/>
+          <a:p>
+            <a:endParaRPr lang="en-IN"/>
+          </a:p>
+        </p:txBody>
       </p:sp>
       <p:sp>
         <p:nvSpPr>
@@ -8519,7 +8719,7 @@
           <a:bodyPr wrap="square" lIns="0" tIns="0" rIns="0" bIns="0" rtlCol="0" anchor="ctr"/>
           <a:lstStyle/>
           <a:p>
-            <a:pPr indent="0" marL="0">
+            <a:pPr marL="0" indent="0">
               <a:buNone/>
             </a:pPr>
             <a:r>
@@ -8558,7 +8758,7 @@
           <a:bodyPr wrap="square" lIns="0" tIns="0" rIns="0" bIns="0" rtlCol="0" anchor="t"/>
           <a:lstStyle/>
           <a:p>
-            <a:pPr indent="0" marL="0">
+            <a:pPr marL="0" indent="0">
               <a:buNone/>
             </a:pPr>
             <a:r>
@@ -8592,6 +8792,7 @@
         <a:solidFill>
           <a:srgbClr val="FFFFFF"/>
         </a:solidFill>
+        <a:effectLst/>
       </p:bgPr>
     </p:bg>
     <p:spTree>
@@ -8629,11 +8830,11 @@
           <a:bodyPr wrap="square" lIns="0" tIns="0" rIns="0" bIns="0" rtlCol="0" anchor="ctr"/>
           <a:lstStyle/>
           <a:p>
-            <a:pPr indent="0" marL="0">
-              <a:buNone/>
-            </a:pPr>
-            <a:r>
-              <a:rPr lang="en-US" sz="1200" b="1" spc="300" kern="0" dirty="0">
+            <a:pPr marL="0" indent="0">
+              <a:buNone/>
+            </a:pPr>
+            <a:r>
+              <a:rPr lang="en-US" sz="1200" b="1" kern="0" spc="300" dirty="0">
                 <a:solidFill>
                   <a:srgbClr val="0B7A85"/>
                 </a:solidFill>
@@ -8668,7 +8869,7 @@
           <a:bodyPr wrap="square" lIns="0" tIns="0" rIns="0" bIns="0" rtlCol="0" anchor="t"/>
           <a:lstStyle/>
           <a:p>
-            <a:pPr indent="0" marL="0">
+            <a:pPr marL="0" indent="0">
               <a:buNone/>
             </a:pPr>
             <a:r>
@@ -8712,6 +8913,13 @@
             <a:prstDash val="solid"/>
           </a:ln>
         </p:spPr>
+        <p:txBody>
+          <a:bodyPr/>
+          <a:lstStyle/>
+          <a:p>
+            <a:endParaRPr lang="en-IN"/>
+          </a:p>
+        </p:txBody>
       </p:sp>
       <p:sp>
         <p:nvSpPr>
@@ -8734,7 +8942,7 @@
           <a:bodyPr wrap="square" lIns="0" tIns="0" rIns="0" bIns="0" rtlCol="0" anchor="ctr"/>
           <a:lstStyle/>
           <a:p>
-            <a:pPr algn="ctr" indent="0" marL="0">
+            <a:pPr marL="0" indent="0" algn="ctr">
               <a:buNone/>
             </a:pPr>
             <a:r>
@@ -8751,7 +8959,7 @@
             <a:endParaRPr lang="en-US" sz="1400" dirty="0"/>
           </a:p>
           <a:p>
-            <a:pPr algn="ctr" indent="0" marL="0">
+            <a:pPr marL="0" indent="0" algn="ctr">
               <a:buNone/>
             </a:pPr>
             <a:r>
@@ -8795,6 +9003,13 @@
             <a:prstDash val="solid"/>
           </a:ln>
         </p:spPr>
+        <p:txBody>
+          <a:bodyPr/>
+          <a:lstStyle/>
+          <a:p>
+            <a:endParaRPr lang="en-IN"/>
+          </a:p>
+        </p:txBody>
       </p:sp>
       <p:sp>
         <p:nvSpPr>
@@ -8817,7 +9032,7 @@
           <a:bodyPr wrap="square" lIns="0" tIns="0" rIns="0" bIns="0" rtlCol="0" anchor="ctr"/>
           <a:lstStyle/>
           <a:p>
-            <a:pPr algn="ctr" indent="0" marL="0">
+            <a:pPr marL="0" indent="0" algn="ctr">
               <a:buNone/>
             </a:pPr>
             <a:r>
@@ -8834,7 +9049,7 @@
             <a:endParaRPr lang="en-US" sz="1400" dirty="0"/>
           </a:p>
           <a:p>
-            <a:pPr algn="ctr" indent="0" marL="0">
+            <a:pPr marL="0" indent="0" algn="ctr">
               <a:buNone/>
             </a:pPr>
             <a:r>
@@ -8875,6 +9090,13 @@
             <a:tailEnd type="triangle"/>
           </a:ln>
         </p:spPr>
+        <p:txBody>
+          <a:bodyPr/>
+          <a:lstStyle/>
+          <a:p>
+            <a:endParaRPr lang="en-IN"/>
+          </a:p>
+        </p:txBody>
       </p:sp>
       <p:sp>
         <p:nvSpPr>
@@ -8902,6 +9124,13 @@
             <a:prstDash val="solid"/>
           </a:ln>
         </p:spPr>
+        <p:txBody>
+          <a:bodyPr/>
+          <a:lstStyle/>
+          <a:p>
+            <a:endParaRPr lang="en-IN"/>
+          </a:p>
+        </p:txBody>
       </p:sp>
       <p:sp>
         <p:nvSpPr>
@@ -8924,7 +9153,7 @@
           <a:bodyPr wrap="square" lIns="0" tIns="0" rIns="0" bIns="0" rtlCol="0" anchor="ctr"/>
           <a:lstStyle/>
           <a:p>
-            <a:pPr algn="ctr" indent="0" marL="0">
+            <a:pPr marL="0" indent="0" algn="ctr">
               <a:buNone/>
             </a:pPr>
             <a:r>
@@ -8941,7 +9170,7 @@
             <a:endParaRPr lang="en-US" sz="1400" dirty="0"/>
           </a:p>
           <a:p>
-            <a:pPr algn="ctr" indent="0" marL="0">
+            <a:pPr marL="0" indent="0" algn="ctr">
               <a:buNone/>
             </a:pPr>
             <a:r>
@@ -8982,6 +9211,13 @@
             <a:tailEnd type="triangle"/>
           </a:ln>
         </p:spPr>
+        <p:txBody>
+          <a:bodyPr/>
+          <a:lstStyle/>
+          <a:p>
+            <a:endParaRPr lang="en-IN"/>
+          </a:p>
+        </p:txBody>
       </p:sp>
       <p:sp>
         <p:nvSpPr>
@@ -9009,6 +9245,13 @@
             <a:prstDash val="solid"/>
           </a:ln>
         </p:spPr>
+        <p:txBody>
+          <a:bodyPr/>
+          <a:lstStyle/>
+          <a:p>
+            <a:endParaRPr lang="en-IN"/>
+          </a:p>
+        </p:txBody>
       </p:sp>
       <p:sp>
         <p:nvSpPr>
@@ -9031,7 +9274,7 @@
           <a:bodyPr wrap="square" lIns="0" tIns="0" rIns="0" bIns="0" rtlCol="0" anchor="ctr"/>
           <a:lstStyle/>
           <a:p>
-            <a:pPr indent="0" marL="0">
+            <a:pPr marL="0" indent="0">
               <a:buNone/>
             </a:pPr>
             <a:r>
@@ -9075,6 +9318,13 @@
             <a:prstDash val="solid"/>
           </a:ln>
         </p:spPr>
+        <p:txBody>
+          <a:bodyPr/>
+          <a:lstStyle/>
+          <a:p>
+            <a:endParaRPr lang="en-IN"/>
+          </a:p>
+        </p:txBody>
       </p:sp>
       <p:sp>
         <p:nvSpPr>
@@ -9097,7 +9347,7 @@
           <a:bodyPr wrap="square" lIns="0" tIns="0" rIns="0" bIns="0" rtlCol="0" anchor="ctr"/>
           <a:lstStyle/>
           <a:p>
-            <a:pPr algn="ctr" indent="0" marL="0">
+            <a:pPr marL="0" indent="0" algn="ctr">
               <a:buNone/>
             </a:pPr>
             <a:r>
@@ -9114,7 +9364,7 @@
             <a:endParaRPr lang="en-US" sz="1400" dirty="0"/>
           </a:p>
           <a:p>
-            <a:pPr algn="ctr" indent="0" marL="0">
+            <a:pPr marL="0" indent="0" algn="ctr">
               <a:buNone/>
             </a:pPr>
             <a:r>
@@ -9158,6 +9408,13 @@
             <a:prstDash val="solid"/>
           </a:ln>
         </p:spPr>
+        <p:txBody>
+          <a:bodyPr/>
+          <a:lstStyle/>
+          <a:p>
+            <a:endParaRPr lang="en-IN"/>
+          </a:p>
+        </p:txBody>
       </p:sp>
       <p:sp>
         <p:nvSpPr>
@@ -9180,7 +9437,7 @@
           <a:bodyPr wrap="square" lIns="0" tIns="0" rIns="0" bIns="0" rtlCol="0" anchor="ctr"/>
           <a:lstStyle/>
           <a:p>
-            <a:pPr algn="ctr" indent="0" marL="0">
+            <a:pPr marL="0" indent="0" algn="ctr">
               <a:buNone/>
             </a:pPr>
             <a:r>
@@ -9197,7 +9454,7 @@
             <a:endParaRPr lang="en-US" sz="1400" dirty="0"/>
           </a:p>
           <a:p>
-            <a:pPr algn="ctr" indent="0" marL="0">
+            <a:pPr marL="0" indent="0" algn="ctr">
               <a:buNone/>
             </a:pPr>
             <a:r>
@@ -9241,6 +9498,13 @@
             <a:prstDash val="solid"/>
           </a:ln>
         </p:spPr>
+        <p:txBody>
+          <a:bodyPr/>
+          <a:lstStyle/>
+          <a:p>
+            <a:endParaRPr lang="en-IN"/>
+          </a:p>
+        </p:txBody>
       </p:sp>
       <p:sp>
         <p:nvSpPr>
@@ -9263,7 +9527,7 @@
           <a:bodyPr wrap="square" lIns="0" tIns="0" rIns="0" bIns="0" rtlCol="0" anchor="ctr"/>
           <a:lstStyle/>
           <a:p>
-            <a:pPr algn="ctr" indent="0" marL="0">
+            <a:pPr marL="0" indent="0" algn="ctr">
               <a:buNone/>
             </a:pPr>
             <a:r>
@@ -9280,7 +9544,7 @@
             <a:endParaRPr lang="en-US" sz="1400" dirty="0"/>
           </a:p>
           <a:p>
-            <a:pPr algn="ctr" indent="0" marL="0">
+            <a:pPr marL="0" indent="0" algn="ctr">
               <a:buNone/>
             </a:pPr>
             <a:r>
@@ -9321,6 +9585,13 @@
             <a:tailEnd type="triangle"/>
           </a:ln>
         </p:spPr>
+        <p:txBody>
+          <a:bodyPr/>
+          <a:lstStyle/>
+          <a:p>
+            <a:endParaRPr lang="en-IN"/>
+          </a:p>
+        </p:txBody>
       </p:sp>
       <p:sp>
         <p:nvSpPr>
@@ -9345,6 +9616,13 @@
             <a:tailEnd type="triangle"/>
           </a:ln>
         </p:spPr>
+        <p:txBody>
+          <a:bodyPr/>
+          <a:lstStyle/>
+          <a:p>
+            <a:endParaRPr lang="en-IN"/>
+          </a:p>
+        </p:txBody>
       </p:sp>
       <p:sp>
         <p:nvSpPr>
@@ -9372,6 +9650,13 @@
             <a:prstDash val="solid"/>
           </a:ln>
         </p:spPr>
+        <p:txBody>
+          <a:bodyPr/>
+          <a:lstStyle/>
+          <a:p>
+            <a:endParaRPr lang="en-IN"/>
+          </a:p>
+        </p:txBody>
       </p:sp>
       <p:sp>
         <p:nvSpPr>
@@ -9394,7 +9679,7 @@
           <a:bodyPr wrap="square" lIns="0" tIns="0" rIns="0" bIns="0" rtlCol="0" anchor="ctr"/>
           <a:lstStyle/>
           <a:p>
-            <a:pPr algn="ctr" indent="0" marL="0">
+            <a:pPr marL="0" indent="0" algn="ctr">
               <a:buNone/>
             </a:pPr>
             <a:r>
@@ -9411,7 +9696,7 @@
             <a:endParaRPr lang="en-US" sz="1400" dirty="0"/>
           </a:p>
           <a:p>
-            <a:pPr algn="ctr" indent="0" marL="0">
+            <a:pPr marL="0" indent="0" algn="ctr">
               <a:buNone/>
             </a:pPr>
             <a:r>
@@ -9455,6 +9740,13 @@
             <a:prstDash val="solid"/>
           </a:ln>
         </p:spPr>
+        <p:txBody>
+          <a:bodyPr/>
+          <a:lstStyle/>
+          <a:p>
+            <a:endParaRPr lang="en-IN"/>
+          </a:p>
+        </p:txBody>
       </p:sp>
       <p:sp>
         <p:nvSpPr>
@@ -9477,7 +9769,7 @@
           <a:bodyPr wrap="square" lIns="0" tIns="0" rIns="0" bIns="0" rtlCol="0" anchor="ctr"/>
           <a:lstStyle/>
           <a:p>
-            <a:pPr algn="ctr" indent="0" marL="0">
+            <a:pPr marL="0" indent="0" algn="ctr">
               <a:buNone/>
             </a:pPr>
             <a:r>
@@ -9494,7 +9786,7 @@
             <a:endParaRPr lang="en-US" sz="1400" dirty="0"/>
           </a:p>
           <a:p>
-            <a:pPr algn="ctr" indent="0" marL="0">
+            <a:pPr marL="0" indent="0" algn="ctr">
               <a:buNone/>
             </a:pPr>
             <a:r>
@@ -9535,6 +9827,13 @@
             <a:tailEnd type="triangle"/>
           </a:ln>
         </p:spPr>
+        <p:txBody>
+          <a:bodyPr/>
+          <a:lstStyle/>
+          <a:p>
+            <a:endParaRPr lang="en-IN"/>
+          </a:p>
+        </p:txBody>
       </p:sp>
       <p:sp>
         <p:nvSpPr>
@@ -9559,6 +9858,13 @@
             <a:tailEnd type="triangle"/>
           </a:ln>
         </p:spPr>
+        <p:txBody>
+          <a:bodyPr/>
+          <a:lstStyle/>
+          <a:p>
+            <a:endParaRPr lang="en-IN"/>
+          </a:p>
+        </p:txBody>
       </p:sp>
       <p:sp>
         <p:nvSpPr>
@@ -9586,6 +9892,13 @@
             <a:prstDash val="solid"/>
           </a:ln>
         </p:spPr>
+        <p:txBody>
+          <a:bodyPr/>
+          <a:lstStyle/>
+          <a:p>
+            <a:endParaRPr lang="en-IN"/>
+          </a:p>
+        </p:txBody>
       </p:sp>
       <p:sp>
         <p:nvSpPr>
@@ -9608,7 +9921,7 @@
           <a:bodyPr wrap="square" lIns="0" tIns="0" rIns="0" bIns="0" rtlCol="0" anchor="ctr"/>
           <a:lstStyle/>
           <a:p>
-            <a:pPr algn="ctr" indent="0" marL="0">
+            <a:pPr marL="0" indent="0" algn="ctr">
               <a:buNone/>
             </a:pPr>
             <a:r>
@@ -9649,6 +9962,13 @@
             <a:tailEnd type="triangle"/>
           </a:ln>
         </p:spPr>
+        <p:txBody>
+          <a:bodyPr/>
+          <a:lstStyle/>
+          <a:p>
+            <a:endParaRPr lang="en-IN"/>
+          </a:p>
+        </p:txBody>
       </p:sp>
       <p:sp>
         <p:nvSpPr>
@@ -9673,6 +9993,13 @@
             <a:tailEnd type="triangle"/>
           </a:ln>
         </p:spPr>
+        <p:txBody>
+          <a:bodyPr/>
+          <a:lstStyle/>
+          <a:p>
+            <a:endParaRPr lang="en-IN"/>
+          </a:p>
+        </p:txBody>
       </p:sp>
       <p:sp>
         <p:nvSpPr>
@@ -9697,6 +10024,13 @@
             <a:tailEnd type="triangle"/>
           </a:ln>
         </p:spPr>
+        <p:txBody>
+          <a:bodyPr/>
+          <a:lstStyle/>
+          <a:p>
+            <a:endParaRPr lang="en-IN"/>
+          </a:p>
+        </p:txBody>
       </p:sp>
       <p:sp>
         <p:nvSpPr>
@@ -9724,6 +10058,13 @@
             <a:prstDash val="solid"/>
           </a:ln>
         </p:spPr>
+        <p:txBody>
+          <a:bodyPr/>
+          <a:lstStyle/>
+          <a:p>
+            <a:endParaRPr lang="en-IN"/>
+          </a:p>
+        </p:txBody>
       </p:sp>
       <p:sp>
         <p:nvSpPr>
@@ -9746,7 +10087,7 @@
           <a:bodyPr wrap="square" lIns="0" tIns="0" rIns="0" bIns="0" rtlCol="0" anchor="ctr"/>
           <a:lstStyle/>
           <a:p>
-            <a:pPr algn="ctr" indent="0" marL="0">
+            <a:pPr marL="0" indent="0" algn="ctr">
               <a:buNone/>
             </a:pPr>
             <a:r>
@@ -9763,7 +10104,7 @@
             <a:endParaRPr lang="en-US" sz="1400" dirty="0"/>
           </a:p>
           <a:p>
-            <a:pPr algn="ctr" indent="0" marL="0">
+            <a:pPr marL="0" indent="0" algn="ctr">
               <a:buNone/>
             </a:pPr>
             <a:r>
@@ -9807,6 +10148,13 @@
             <a:prstDash val="solid"/>
           </a:ln>
         </p:spPr>
+        <p:txBody>
+          <a:bodyPr/>
+          <a:lstStyle/>
+          <a:p>
+            <a:endParaRPr lang="en-IN"/>
+          </a:p>
+        </p:txBody>
       </p:sp>
       <p:sp>
         <p:nvSpPr>
@@ -9829,7 +10177,7 @@
           <a:bodyPr wrap="square" lIns="0" tIns="0" rIns="0" bIns="0" rtlCol="0" anchor="ctr"/>
           <a:lstStyle/>
           <a:p>
-            <a:pPr algn="ctr" indent="0" marL="0">
+            <a:pPr marL="0" indent="0" algn="ctr">
               <a:buNone/>
             </a:pPr>
             <a:r>
@@ -9846,7 +10194,7 @@
             <a:endParaRPr lang="en-US" sz="1400" dirty="0"/>
           </a:p>
           <a:p>
-            <a:pPr algn="ctr" indent="0" marL="0">
+            <a:pPr marL="0" indent="0" algn="ctr">
               <a:buNone/>
             </a:pPr>
             <a:r>
@@ -9890,6 +10238,13 @@
             <a:prstDash val="solid"/>
           </a:ln>
         </p:spPr>
+        <p:txBody>
+          <a:bodyPr/>
+          <a:lstStyle/>
+          <a:p>
+            <a:endParaRPr lang="en-IN"/>
+          </a:p>
+        </p:txBody>
       </p:sp>
       <p:sp>
         <p:nvSpPr>
@@ -9912,7 +10267,7 @@
           <a:bodyPr wrap="square" lIns="0" tIns="0" rIns="0" bIns="0" rtlCol="0" anchor="ctr"/>
           <a:lstStyle/>
           <a:p>
-            <a:pPr algn="ctr" indent="0" marL="0">
+            <a:pPr marL="0" indent="0" algn="ctr">
               <a:buNone/>
             </a:pPr>
             <a:r>
@@ -9929,7 +10284,7 @@
             <a:endParaRPr lang="en-US" sz="1400" dirty="0"/>
           </a:p>
           <a:p>
-            <a:pPr algn="ctr" indent="0" marL="0">
+            <a:pPr marL="0" indent="0" algn="ctr">
               <a:buNone/>
             </a:pPr>
             <a:r>
@@ -9970,6 +10325,13 @@
             <a:tailEnd type="triangle"/>
           </a:ln>
         </p:spPr>
+        <p:txBody>
+          <a:bodyPr/>
+          <a:lstStyle/>
+          <a:p>
+            <a:endParaRPr lang="en-IN"/>
+          </a:p>
+        </p:txBody>
       </p:sp>
       <p:sp>
         <p:nvSpPr>
@@ -9994,6 +10356,13 @@
             <a:tailEnd type="triangle"/>
           </a:ln>
         </p:spPr>
+        <p:txBody>
+          <a:bodyPr/>
+          <a:lstStyle/>
+          <a:p>
+            <a:endParaRPr lang="en-IN"/>
+          </a:p>
+        </p:txBody>
       </p:sp>
       <p:sp>
         <p:nvSpPr>
@@ -10016,7 +10385,7 @@
           <a:bodyPr wrap="square" lIns="0" tIns="0" rIns="0" bIns="0" rtlCol="0" anchor="t"/>
           <a:lstStyle/>
           <a:p>
-            <a:pPr indent="0" marL="0">
+            <a:pPr marL="0" indent="0">
               <a:buNone/>
             </a:pPr>
             <a:r>
@@ -10050,6 +10419,7 @@
         <a:solidFill>
           <a:srgbClr val="FFFFFF"/>
         </a:solidFill>
+        <a:effectLst/>
       </p:bgPr>
     </p:bg>
     <p:spTree>
@@ -10087,11 +10457,11 @@
           <a:bodyPr wrap="square" lIns="0" tIns="0" rIns="0" bIns="0" rtlCol="0" anchor="ctr"/>
           <a:lstStyle/>
           <a:p>
-            <a:pPr indent="0" marL="0">
-              <a:buNone/>
-            </a:pPr>
-            <a:r>
-              <a:rPr lang="en-US" sz="1200" b="1" spc="300" kern="0" dirty="0">
+            <a:pPr marL="0" indent="0">
+              <a:buNone/>
+            </a:pPr>
+            <a:r>
+              <a:rPr lang="en-US" sz="1200" b="1" kern="0" spc="300" dirty="0">
                 <a:solidFill>
                   <a:srgbClr val="0B7A85"/>
                 </a:solidFill>
@@ -10126,7 +10496,7 @@
           <a:bodyPr wrap="square" lIns="0" tIns="0" rIns="0" bIns="0" rtlCol="0" anchor="t"/>
           <a:lstStyle/>
           <a:p>
-            <a:pPr indent="0" marL="0">
+            <a:pPr marL="0" indent="0">
               <a:buNone/>
             </a:pPr>
             <a:r>
@@ -10170,6 +10540,13 @@
             <a:prstDash val="solid"/>
           </a:ln>
         </p:spPr>
+        <p:txBody>
+          <a:bodyPr/>
+          <a:lstStyle/>
+          <a:p>
+            <a:endParaRPr lang="en-IN"/>
+          </a:p>
+        </p:txBody>
       </p:sp>
       <p:sp>
         <p:nvSpPr>
@@ -10197,6 +10574,13 @@
             <a:prstDash val="solid"/>
           </a:ln>
         </p:spPr>
+        <p:txBody>
+          <a:bodyPr/>
+          <a:lstStyle/>
+          <a:p>
+            <a:endParaRPr lang="en-IN"/>
+          </a:p>
+        </p:txBody>
       </p:sp>
       <p:sp>
         <p:nvSpPr>
@@ -10219,7 +10603,7 @@
           <a:bodyPr wrap="square" lIns="0" tIns="0" rIns="0" bIns="0" rtlCol="0" anchor="ctr"/>
           <a:lstStyle/>
           <a:p>
-            <a:pPr algn="ctr" indent="0" marL="0">
+            <a:pPr marL="0" indent="0" algn="ctr">
               <a:buNone/>
             </a:pPr>
             <a:r>
@@ -10258,7 +10642,7 @@
           <a:bodyPr wrap="square" lIns="0" tIns="0" rIns="0" bIns="0" rtlCol="0" anchor="t"/>
           <a:lstStyle/>
           <a:p>
-            <a:pPr indent="0" marL="0">
+            <a:pPr marL="0" indent="0">
               <a:buNone/>
             </a:pPr>
             <a:r>
@@ -10297,7 +10681,7 @@
           <a:bodyPr wrap="square" lIns="0" tIns="0" rIns="0" bIns="0" rtlCol="0" anchor="t"/>
           <a:lstStyle/>
           <a:p>
-            <a:pPr indent="0" marL="0">
+            <a:pPr marL="0" indent="0">
               <a:buNone/>
             </a:pPr>
             <a:r>
@@ -10341,6 +10725,13 @@
             <a:prstDash val="solid"/>
           </a:ln>
         </p:spPr>
+        <p:txBody>
+          <a:bodyPr/>
+          <a:lstStyle/>
+          <a:p>
+            <a:endParaRPr lang="en-IN"/>
+          </a:p>
+        </p:txBody>
       </p:sp>
       <p:sp>
         <p:nvSpPr>
@@ -10368,6 +10759,13 @@
             <a:prstDash val="solid"/>
           </a:ln>
         </p:spPr>
+        <p:txBody>
+          <a:bodyPr/>
+          <a:lstStyle/>
+          <a:p>
+            <a:endParaRPr lang="en-IN"/>
+          </a:p>
+        </p:txBody>
       </p:sp>
       <p:sp>
         <p:nvSpPr>
@@ -10390,7 +10788,7 @@
           <a:bodyPr wrap="square" lIns="0" tIns="0" rIns="0" bIns="0" rtlCol="0" anchor="ctr"/>
           <a:lstStyle/>
           <a:p>
-            <a:pPr algn="ctr" indent="0" marL="0">
+            <a:pPr marL="0" indent="0" algn="ctr">
               <a:buNone/>
             </a:pPr>
             <a:r>
@@ -10429,7 +10827,7 @@
           <a:bodyPr wrap="square" lIns="0" tIns="0" rIns="0" bIns="0" rtlCol="0" anchor="t"/>
           <a:lstStyle/>
           <a:p>
-            <a:pPr indent="0" marL="0">
+            <a:pPr marL="0" indent="0">
               <a:buNone/>
             </a:pPr>
             <a:r>
@@ -10468,7 +10866,7 @@
           <a:bodyPr wrap="square" lIns="0" tIns="0" rIns="0" bIns="0" rtlCol="0" anchor="t"/>
           <a:lstStyle/>
           <a:p>
-            <a:pPr indent="0" marL="0">
+            <a:pPr marL="0" indent="0">
               <a:buNone/>
             </a:pPr>
             <a:r>
@@ -10512,6 +10910,13 @@
             <a:prstDash val="solid"/>
           </a:ln>
         </p:spPr>
+        <p:txBody>
+          <a:bodyPr/>
+          <a:lstStyle/>
+          <a:p>
+            <a:endParaRPr lang="en-IN"/>
+          </a:p>
+        </p:txBody>
       </p:sp>
       <p:sp>
         <p:nvSpPr>
@@ -10539,6 +10944,13 @@
             <a:prstDash val="solid"/>
           </a:ln>
         </p:spPr>
+        <p:txBody>
+          <a:bodyPr/>
+          <a:lstStyle/>
+          <a:p>
+            <a:endParaRPr lang="en-IN"/>
+          </a:p>
+        </p:txBody>
       </p:sp>
       <p:sp>
         <p:nvSpPr>
@@ -10561,7 +10973,7 @@
           <a:bodyPr wrap="square" lIns="0" tIns="0" rIns="0" bIns="0" rtlCol="0" anchor="ctr"/>
           <a:lstStyle/>
           <a:p>
-            <a:pPr algn="ctr" indent="0" marL="0">
+            <a:pPr marL="0" indent="0" algn="ctr">
               <a:buNone/>
             </a:pPr>
             <a:r>
@@ -10600,7 +11012,7 @@
           <a:bodyPr wrap="square" lIns="0" tIns="0" rIns="0" bIns="0" rtlCol="0" anchor="t"/>
           <a:lstStyle/>
           <a:p>
-            <a:pPr indent="0" marL="0">
+            <a:pPr marL="0" indent="0">
               <a:buNone/>
             </a:pPr>
             <a:r>
@@ -10639,7 +11051,7 @@
           <a:bodyPr wrap="square" lIns="0" tIns="0" rIns="0" bIns="0" rtlCol="0" anchor="t"/>
           <a:lstStyle/>
           <a:p>
-            <a:pPr indent="0" marL="0">
+            <a:pPr marL="0" indent="0">
               <a:buNone/>
             </a:pPr>
             <a:r>
@@ -10683,6 +11095,13 @@
             <a:prstDash val="solid"/>
           </a:ln>
         </p:spPr>
+        <p:txBody>
+          <a:bodyPr/>
+          <a:lstStyle/>
+          <a:p>
+            <a:endParaRPr lang="en-IN"/>
+          </a:p>
+        </p:txBody>
       </p:sp>
       <p:sp>
         <p:nvSpPr>
@@ -10710,6 +11129,13 @@
             <a:prstDash val="solid"/>
           </a:ln>
         </p:spPr>
+        <p:txBody>
+          <a:bodyPr/>
+          <a:lstStyle/>
+          <a:p>
+            <a:endParaRPr lang="en-IN"/>
+          </a:p>
+        </p:txBody>
       </p:sp>
       <p:sp>
         <p:nvSpPr>
@@ -10732,7 +11158,7 @@
           <a:bodyPr wrap="square" lIns="0" tIns="0" rIns="0" bIns="0" rtlCol="0" anchor="ctr"/>
           <a:lstStyle/>
           <a:p>
-            <a:pPr algn="ctr" indent="0" marL="0">
+            <a:pPr marL="0" indent="0" algn="ctr">
               <a:buNone/>
             </a:pPr>
             <a:r>
@@ -10771,7 +11197,7 @@
           <a:bodyPr wrap="square" lIns="0" tIns="0" rIns="0" bIns="0" rtlCol="0" anchor="t"/>
           <a:lstStyle/>
           <a:p>
-            <a:pPr indent="0" marL="0">
+            <a:pPr marL="0" indent="0">
               <a:buNone/>
             </a:pPr>
             <a:r>
@@ -10810,7 +11236,7 @@
           <a:bodyPr wrap="square" lIns="0" tIns="0" rIns="0" bIns="0" rtlCol="0" anchor="t"/>
           <a:lstStyle/>
           <a:p>
-            <a:pPr indent="0" marL="0">
+            <a:pPr marL="0" indent="0">
               <a:buNone/>
             </a:pPr>
             <a:r>
@@ -10849,7 +11275,7 @@
           <a:bodyPr wrap="square" lIns="0" tIns="0" rIns="0" bIns="0" rtlCol="0" anchor="t"/>
           <a:lstStyle/>
           <a:p>
-            <a:pPr indent="0" marL="0">
+            <a:pPr marL="0" indent="0">
               <a:buNone/>
             </a:pPr>
             <a:r>
@@ -10883,6 +11309,7 @@
         <a:solidFill>
           <a:srgbClr val="FFFFFF"/>
         </a:solidFill>
+        <a:effectLst/>
       </p:bgPr>
     </p:bg>
     <p:spTree>
@@ -10920,11 +11347,11 @@
           <a:bodyPr wrap="square" lIns="0" tIns="0" rIns="0" bIns="0" rtlCol="0" anchor="ctr"/>
           <a:lstStyle/>
           <a:p>
-            <a:pPr indent="0" marL="0">
-              <a:buNone/>
-            </a:pPr>
-            <a:r>
-              <a:rPr lang="en-US" sz="1200" b="1" spc="300" kern="0" dirty="0">
+            <a:pPr marL="0" indent="0">
+              <a:buNone/>
+            </a:pPr>
+            <a:r>
+              <a:rPr lang="en-US" sz="1200" b="1" kern="0" spc="300" dirty="0">
                 <a:solidFill>
                   <a:srgbClr val="0B7A85"/>
                 </a:solidFill>
@@ -10959,7 +11386,7 @@
           <a:bodyPr wrap="square" lIns="0" tIns="0" rIns="0" bIns="0" rtlCol="0" anchor="t"/>
           <a:lstStyle/>
           <a:p>
-            <a:pPr indent="0" marL="0">
+            <a:pPr marL="0" indent="0">
               <a:buNone/>
             </a:pPr>
             <a:r>
@@ -11001,6 +11428,13 @@
             <a:prstDash val="solid"/>
           </a:ln>
         </p:spPr>
+        <p:txBody>
+          <a:bodyPr/>
+          <a:lstStyle/>
+          <a:p>
+            <a:endParaRPr lang="en-IN"/>
+          </a:p>
+        </p:txBody>
       </p:sp>
       <p:sp>
         <p:nvSpPr>
@@ -11023,7 +11457,7 @@
           <a:bodyPr wrap="square" lIns="0" tIns="0" rIns="0" bIns="0" rtlCol="0" anchor="ctr"/>
           <a:lstStyle/>
           <a:p>
-            <a:pPr algn="ctr" indent="0" marL="0">
+            <a:pPr marL="0" indent="0" algn="ctr">
               <a:buNone/>
             </a:pPr>
             <a:r>
@@ -11062,7 +11496,7 @@
           <a:bodyPr wrap="square" lIns="0" tIns="0" rIns="0" bIns="0" rtlCol="0" anchor="ctr"/>
           <a:lstStyle/>
           <a:p>
-            <a:pPr indent="0" marL="0">
+            <a:pPr marL="0" indent="0">
               <a:buNone/>
             </a:pPr>
             <a:r>
@@ -11106,6 +11540,13 @@
             <a:prstDash val="solid"/>
           </a:ln>
         </p:spPr>
+        <p:txBody>
+          <a:bodyPr/>
+          <a:lstStyle/>
+          <a:p>
+            <a:endParaRPr lang="en-IN"/>
+          </a:p>
+        </p:txBody>
       </p:sp>
       <p:sp>
         <p:nvSpPr>
@@ -11128,7 +11569,7 @@
           <a:bodyPr wrap="square" lIns="0" tIns="0" rIns="0" bIns="0" rtlCol="0" anchor="ctr"/>
           <a:lstStyle/>
           <a:p>
-            <a:pPr algn="ctr" indent="0" marL="0">
+            <a:pPr marL="0" indent="0" algn="ctr">
               <a:buNone/>
             </a:pPr>
             <a:r>
@@ -11170,6 +11611,13 @@
             <a:prstDash val="solid"/>
           </a:ln>
         </p:spPr>
+        <p:txBody>
+          <a:bodyPr/>
+          <a:lstStyle/>
+          <a:p>
+            <a:endParaRPr lang="en-IN"/>
+          </a:p>
+        </p:txBody>
       </p:sp>
       <p:sp>
         <p:nvSpPr>
@@ -11192,7 +11640,7 @@
           <a:bodyPr wrap="square" lIns="0" tIns="0" rIns="0" bIns="0" rtlCol="0" anchor="ctr"/>
           <a:lstStyle/>
           <a:p>
-            <a:pPr algn="ctr" indent="0" marL="0">
+            <a:pPr marL="0" indent="0" algn="ctr">
               <a:buNone/>
             </a:pPr>
             <a:r>
@@ -11231,7 +11679,7 @@
           <a:bodyPr wrap="square" lIns="0" tIns="0" rIns="0" bIns="0" rtlCol="0" anchor="ctr"/>
           <a:lstStyle/>
           <a:p>
-            <a:pPr indent="0" marL="0">
+            <a:pPr marL="0" indent="0">
               <a:buNone/>
             </a:pPr>
             <a:r>
@@ -11275,6 +11723,13 @@
             <a:prstDash val="solid"/>
           </a:ln>
         </p:spPr>
+        <p:txBody>
+          <a:bodyPr/>
+          <a:lstStyle/>
+          <a:p>
+            <a:endParaRPr lang="en-IN"/>
+          </a:p>
+        </p:txBody>
       </p:sp>
       <p:sp>
         <p:nvSpPr>
@@ -11297,7 +11752,7 @@
           <a:bodyPr wrap="square" lIns="0" tIns="0" rIns="0" bIns="0" rtlCol="0" anchor="ctr"/>
           <a:lstStyle/>
           <a:p>
-            <a:pPr algn="ctr" indent="0" marL="0">
+            <a:pPr marL="0" indent="0" algn="ctr">
               <a:buNone/>
             </a:pPr>
             <a:r>
@@ -11339,6 +11794,13 @@
             <a:prstDash val="solid"/>
           </a:ln>
         </p:spPr>
+        <p:txBody>
+          <a:bodyPr/>
+          <a:lstStyle/>
+          <a:p>
+            <a:endParaRPr lang="en-IN"/>
+          </a:p>
+        </p:txBody>
       </p:sp>
       <p:sp>
         <p:nvSpPr>
@@ -11361,7 +11823,7 @@
           <a:bodyPr wrap="square" lIns="0" tIns="0" rIns="0" bIns="0" rtlCol="0" anchor="ctr"/>
           <a:lstStyle/>
           <a:p>
-            <a:pPr algn="ctr" indent="0" marL="0">
+            <a:pPr marL="0" indent="0" algn="ctr">
               <a:buNone/>
             </a:pPr>
             <a:r>
@@ -11400,7 +11862,7 @@
           <a:bodyPr wrap="square" lIns="0" tIns="0" rIns="0" bIns="0" rtlCol="0" anchor="ctr"/>
           <a:lstStyle/>
           <a:p>
-            <a:pPr indent="0" marL="0">
+            <a:pPr marL="0" indent="0">
               <a:buNone/>
             </a:pPr>
             <a:r>
@@ -11444,6 +11906,13 @@
             <a:prstDash val="solid"/>
           </a:ln>
         </p:spPr>
+        <p:txBody>
+          <a:bodyPr/>
+          <a:lstStyle/>
+          <a:p>
+            <a:endParaRPr lang="en-IN"/>
+          </a:p>
+        </p:txBody>
       </p:sp>
       <p:sp>
         <p:nvSpPr>
@@ -11466,7 +11935,7 @@
           <a:bodyPr wrap="square" lIns="0" tIns="0" rIns="0" bIns="0" rtlCol="0" anchor="ctr"/>
           <a:lstStyle/>
           <a:p>
-            <a:pPr algn="ctr" indent="0" marL="0">
+            <a:pPr marL="0" indent="0" algn="ctr">
               <a:buNone/>
             </a:pPr>
             <a:r>
@@ -11508,6 +11977,13 @@
             <a:prstDash val="solid"/>
           </a:ln>
         </p:spPr>
+        <p:txBody>
+          <a:bodyPr/>
+          <a:lstStyle/>
+          <a:p>
+            <a:endParaRPr lang="en-IN"/>
+          </a:p>
+        </p:txBody>
       </p:sp>
       <p:sp>
         <p:nvSpPr>
@@ -11530,7 +12006,7 @@
           <a:bodyPr wrap="square" lIns="0" tIns="0" rIns="0" bIns="0" rtlCol="0" anchor="ctr"/>
           <a:lstStyle/>
           <a:p>
-            <a:pPr algn="ctr" indent="0" marL="0">
+            <a:pPr marL="0" indent="0" algn="ctr">
               <a:buNone/>
             </a:pPr>
             <a:r>
@@ -11569,7 +12045,7 @@
           <a:bodyPr wrap="square" lIns="0" tIns="0" rIns="0" bIns="0" rtlCol="0" anchor="ctr"/>
           <a:lstStyle/>
           <a:p>
-            <a:pPr indent="0" marL="0">
+            <a:pPr marL="0" indent="0">
               <a:buNone/>
             </a:pPr>
             <a:r>
@@ -11613,6 +12089,13 @@
             <a:prstDash val="solid"/>
           </a:ln>
         </p:spPr>
+        <p:txBody>
+          <a:bodyPr/>
+          <a:lstStyle/>
+          <a:p>
+            <a:endParaRPr lang="en-IN"/>
+          </a:p>
+        </p:txBody>
       </p:sp>
       <p:sp>
         <p:nvSpPr>
@@ -11635,7 +12118,7 @@
           <a:bodyPr wrap="square" lIns="0" tIns="0" rIns="0" bIns="0" rtlCol="0" anchor="ctr"/>
           <a:lstStyle/>
           <a:p>
-            <a:pPr algn="ctr" indent="0" marL="0">
+            <a:pPr marL="0" indent="0" algn="ctr">
               <a:buNone/>
             </a:pPr>
             <a:r>
@@ -11677,6 +12160,13 @@
             <a:prstDash val="solid"/>
           </a:ln>
         </p:spPr>
+        <p:txBody>
+          <a:bodyPr/>
+          <a:lstStyle/>
+          <a:p>
+            <a:endParaRPr lang="en-IN"/>
+          </a:p>
+        </p:txBody>
       </p:sp>
       <p:sp>
         <p:nvSpPr>
@@ -11699,7 +12189,7 @@
           <a:bodyPr wrap="square" lIns="0" tIns="0" rIns="0" bIns="0" rtlCol="0" anchor="ctr"/>
           <a:lstStyle/>
           <a:p>
-            <a:pPr algn="ctr" indent="0" marL="0">
+            <a:pPr marL="0" indent="0" algn="ctr">
               <a:buNone/>
             </a:pPr>
             <a:r>
@@ -11738,7 +12228,7 @@
           <a:bodyPr wrap="square" lIns="0" tIns="0" rIns="0" bIns="0" rtlCol="0" anchor="ctr"/>
           <a:lstStyle/>
           <a:p>
-            <a:pPr indent="0" marL="0">
+            <a:pPr marL="0" indent="0">
               <a:buNone/>
             </a:pPr>
             <a:r>
@@ -11782,6 +12272,13 @@
             <a:prstDash val="solid"/>
           </a:ln>
         </p:spPr>
+        <p:txBody>
+          <a:bodyPr/>
+          <a:lstStyle/>
+          <a:p>
+            <a:endParaRPr lang="en-IN"/>
+          </a:p>
+        </p:txBody>
       </p:sp>
       <p:sp>
         <p:nvSpPr>
@@ -11804,7 +12301,7 @@
           <a:bodyPr wrap="square" lIns="0" tIns="0" rIns="0" bIns="0" rtlCol="0" anchor="ctr"/>
           <a:lstStyle/>
           <a:p>
-            <a:pPr algn="ctr" indent="0" marL="0">
+            <a:pPr marL="0" indent="0" algn="ctr">
               <a:buNone/>
             </a:pPr>
             <a:r>
@@ -11848,6 +12345,13 @@
             <a:prstDash val="solid"/>
           </a:ln>
         </p:spPr>
+        <p:txBody>
+          <a:bodyPr/>
+          <a:lstStyle/>
+          <a:p>
+            <a:endParaRPr lang="en-IN"/>
+          </a:p>
+        </p:txBody>
       </p:sp>
       <p:sp>
         <p:nvSpPr>
@@ -11870,7 +12374,7 @@
           <a:bodyPr wrap="square" lIns="0" tIns="0" rIns="0" bIns="0" rtlCol="0" anchor="ctr"/>
           <a:lstStyle/>
           <a:p>
-            <a:pPr indent="0" marL="0">
+            <a:pPr marL="0" indent="0">
               <a:buNone/>
             </a:pPr>
             <a:r>
@@ -11909,7 +12413,7 @@
           <a:bodyPr wrap="square" lIns="0" tIns="0" rIns="0" bIns="0" rtlCol="0" anchor="t"/>
           <a:lstStyle/>
           <a:p>
-            <a:pPr indent="0" marL="0">
+            <a:pPr marL="0" indent="0">
               <a:buNone/>
             </a:pPr>
             <a:r>
@@ -11948,7 +12452,7 @@
           <a:bodyPr wrap="square" lIns="0" tIns="0" rIns="0" bIns="0" rtlCol="0" anchor="ctr"/>
           <a:lstStyle/>
           <a:p>
-            <a:pPr indent="0" marL="0">
+            <a:pPr marL="0" indent="0">
               <a:buNone/>
             </a:pPr>
             <a:r>
@@ -11982,6 +12486,7 @@
         <a:solidFill>
           <a:srgbClr val="FFFFFF"/>
         </a:solidFill>
+        <a:effectLst/>
       </p:bgPr>
     </p:bg>
     <p:spTree>
@@ -12019,11 +12524,11 @@
           <a:bodyPr wrap="square" lIns="0" tIns="0" rIns="0" bIns="0" rtlCol="0" anchor="ctr"/>
           <a:lstStyle/>
           <a:p>
-            <a:pPr indent="0" marL="0">
-              <a:buNone/>
-            </a:pPr>
-            <a:r>
-              <a:rPr lang="en-US" sz="1200" b="1" spc="300" kern="0" dirty="0">
+            <a:pPr marL="0" indent="0">
+              <a:buNone/>
+            </a:pPr>
+            <a:r>
+              <a:rPr lang="en-US" sz="1200" b="1" kern="0" spc="300" dirty="0">
                 <a:solidFill>
                   <a:srgbClr val="0B7A85"/>
                 </a:solidFill>
@@ -12058,7 +12563,7 @@
           <a:bodyPr wrap="square" lIns="0" tIns="0" rIns="0" bIns="0" rtlCol="0" anchor="t"/>
           <a:lstStyle/>
           <a:p>
-            <a:pPr indent="0" marL="0">
+            <a:pPr marL="0" indent="0">
               <a:buNone/>
             </a:pPr>
             <a:r>
@@ -12102,6 +12607,13 @@
             <a:prstDash val="solid"/>
           </a:ln>
         </p:spPr>
+        <p:txBody>
+          <a:bodyPr/>
+          <a:lstStyle/>
+          <a:p>
+            <a:endParaRPr lang="en-IN"/>
+          </a:p>
+        </p:txBody>
       </p:sp>
       <p:sp>
         <p:nvSpPr>
@@ -12124,7 +12636,7 @@
           <a:bodyPr wrap="square" lIns="0" tIns="0" rIns="0" bIns="0" rtlCol="0" anchor="ctr"/>
           <a:lstStyle/>
           <a:p>
-            <a:pPr indent="0" marL="0">
+            <a:pPr marL="0" indent="0">
               <a:buNone/>
             </a:pPr>
             <a:r>
@@ -12295,6 +12807,13 @@
             <a:prstDash val="solid"/>
           </a:ln>
         </p:spPr>
+        <p:txBody>
+          <a:bodyPr/>
+          <a:lstStyle/>
+          <a:p>
+            <a:endParaRPr lang="en-IN"/>
+          </a:p>
+        </p:txBody>
       </p:sp>
       <p:sp>
         <p:nvSpPr>
@@ -12317,7 +12836,7 @@
           <a:bodyPr wrap="square" lIns="0" tIns="0" rIns="0" bIns="0" rtlCol="0" anchor="ctr"/>
           <a:lstStyle/>
           <a:p>
-            <a:pPr indent="0" marL="0">
+            <a:pPr marL="0" indent="0">
               <a:buNone/>
             </a:pPr>
             <a:r>
@@ -12488,6 +13007,13 @@
             <a:prstDash val="solid"/>
           </a:ln>
         </p:spPr>
+        <p:txBody>
+          <a:bodyPr/>
+          <a:lstStyle/>
+          <a:p>
+            <a:endParaRPr lang="en-IN"/>
+          </a:p>
+        </p:txBody>
       </p:sp>
       <p:sp>
         <p:nvSpPr>
@@ -12510,7 +13036,7 @@
           <a:bodyPr wrap="square" lIns="0" tIns="0" rIns="0" bIns="0" rtlCol="0" anchor="ctr"/>
           <a:lstStyle/>
           <a:p>
-            <a:pPr indent="0" marL="0">
+            <a:pPr marL="0" indent="0">
               <a:buNone/>
             </a:pPr>
             <a:r>
@@ -12544,6 +13070,7 @@
         <a:solidFill>
           <a:srgbClr val="FFFFFF"/>
         </a:solidFill>
+        <a:effectLst/>
       </p:bgPr>
     </p:bg>
     <p:spTree>
@@ -12581,11 +13108,11 @@
           <a:bodyPr wrap="square" lIns="0" tIns="0" rIns="0" bIns="0" rtlCol="0" anchor="ctr"/>
           <a:lstStyle/>
           <a:p>
-            <a:pPr indent="0" marL="0">
-              <a:buNone/>
-            </a:pPr>
-            <a:r>
-              <a:rPr lang="en-US" sz="1200" b="1" spc="300" kern="0" dirty="0">
+            <a:pPr marL="0" indent="0">
+              <a:buNone/>
+            </a:pPr>
+            <a:r>
+              <a:rPr lang="en-US" sz="1200" b="1" kern="0" spc="300" dirty="0">
                 <a:solidFill>
                   <a:srgbClr val="0B7A85"/>
                 </a:solidFill>
@@ -12620,7 +13147,7 @@
           <a:bodyPr wrap="square" lIns="0" tIns="0" rIns="0" bIns="0" rtlCol="0" anchor="t"/>
           <a:lstStyle/>
           <a:p>
-            <a:pPr indent="0" marL="0">
+            <a:pPr marL="0" indent="0">
               <a:buNone/>
             </a:pPr>
             <a:r>
@@ -12664,6 +13191,13 @@
             <a:prstDash val="solid"/>
           </a:ln>
         </p:spPr>
+        <p:txBody>
+          <a:bodyPr/>
+          <a:lstStyle/>
+          <a:p>
+            <a:endParaRPr lang="en-IN"/>
+          </a:p>
+        </p:txBody>
       </p:sp>
       <p:sp>
         <p:nvSpPr>
@@ -12689,6 +13223,13 @@
             <a:prstDash val="solid"/>
           </a:ln>
         </p:spPr>
+        <p:txBody>
+          <a:bodyPr/>
+          <a:lstStyle/>
+          <a:p>
+            <a:endParaRPr lang="en-IN"/>
+          </a:p>
+        </p:txBody>
       </p:sp>
       <p:sp>
         <p:nvSpPr>
@@ -12711,7 +13252,7 @@
           <a:bodyPr wrap="square" lIns="0" tIns="0" rIns="0" bIns="0" rtlCol="0" anchor="ctr"/>
           <a:lstStyle/>
           <a:p>
-            <a:pPr algn="ctr" indent="0" marL="0">
+            <a:pPr marL="0" indent="0" algn="ctr">
               <a:buNone/>
             </a:pPr>
             <a:r>
@@ -12750,7 +13291,7 @@
           <a:bodyPr wrap="square" lIns="0" tIns="0" rIns="0" bIns="0" rtlCol="0" anchor="ctr"/>
           <a:lstStyle/>
           <a:p>
-            <a:pPr indent="0" marL="0">
+            <a:pPr marL="0" indent="0">
               <a:buNone/>
             </a:pPr>
             <a:r>
@@ -12767,7 +13308,7 @@
             <a:endParaRPr lang="en-US" sz="1400" dirty="0"/>
           </a:p>
           <a:p>
-            <a:pPr indent="0" marL="0">
+            <a:pPr marL="0" indent="0">
               <a:buNone/>
             </a:pPr>
             <a:r>
@@ -12811,6 +13352,13 @@
             <a:prstDash val="solid"/>
           </a:ln>
         </p:spPr>
+        <p:txBody>
+          <a:bodyPr/>
+          <a:lstStyle/>
+          <a:p>
+            <a:endParaRPr lang="en-IN"/>
+          </a:p>
+        </p:txBody>
       </p:sp>
       <p:sp>
         <p:nvSpPr>
@@ -12836,6 +13384,13 @@
             <a:prstDash val="solid"/>
           </a:ln>
         </p:spPr>
+        <p:txBody>
+          <a:bodyPr/>
+          <a:lstStyle/>
+          <a:p>
+            <a:endParaRPr lang="en-IN"/>
+          </a:p>
+        </p:txBody>
       </p:sp>
       <p:sp>
         <p:nvSpPr>
@@ -12858,7 +13413,7 @@
           <a:bodyPr wrap="square" lIns="0" tIns="0" rIns="0" bIns="0" rtlCol="0" anchor="ctr"/>
           <a:lstStyle/>
           <a:p>
-            <a:pPr algn="ctr" indent="0" marL="0">
+            <a:pPr marL="0" indent="0" algn="ctr">
               <a:buNone/>
             </a:pPr>
             <a:r>
@@ -12897,7 +13452,7 @@
           <a:bodyPr wrap="square" lIns="0" tIns="0" rIns="0" bIns="0" rtlCol="0" anchor="ctr"/>
           <a:lstStyle/>
           <a:p>
-            <a:pPr indent="0" marL="0">
+            <a:pPr marL="0" indent="0">
               <a:buNone/>
             </a:pPr>
             <a:r>
@@ -12914,7 +13469,7 @@
             <a:endParaRPr lang="en-US" sz="1400" dirty="0"/>
           </a:p>
           <a:p>
-            <a:pPr indent="0" marL="0">
+            <a:pPr marL="0" indent="0">
               <a:buNone/>
             </a:pPr>
             <a:r>
@@ -12958,6 +13513,13 @@
             <a:prstDash val="solid"/>
           </a:ln>
         </p:spPr>
+        <p:txBody>
+          <a:bodyPr/>
+          <a:lstStyle/>
+          <a:p>
+            <a:endParaRPr lang="en-IN"/>
+          </a:p>
+        </p:txBody>
       </p:sp>
       <p:sp>
         <p:nvSpPr>
@@ -12983,6 +13545,13 @@
             <a:prstDash val="solid"/>
           </a:ln>
         </p:spPr>
+        <p:txBody>
+          <a:bodyPr/>
+          <a:lstStyle/>
+          <a:p>
+            <a:endParaRPr lang="en-IN"/>
+          </a:p>
+        </p:txBody>
       </p:sp>
       <p:sp>
         <p:nvSpPr>
@@ -13005,7 +13574,7 @@
           <a:bodyPr wrap="square" lIns="0" tIns="0" rIns="0" bIns="0" rtlCol="0" anchor="ctr"/>
           <a:lstStyle/>
           <a:p>
-            <a:pPr algn="ctr" indent="0" marL="0">
+            <a:pPr marL="0" indent="0" algn="ctr">
               <a:buNone/>
             </a:pPr>
             <a:r>
@@ -13044,7 +13613,7 @@
           <a:bodyPr wrap="square" lIns="0" tIns="0" rIns="0" bIns="0" rtlCol="0" anchor="ctr"/>
           <a:lstStyle/>
           <a:p>
-            <a:pPr indent="0" marL="0">
+            <a:pPr marL="0" indent="0">
               <a:buNone/>
             </a:pPr>
             <a:r>
@@ -13061,7 +13630,7 @@
             <a:endParaRPr lang="en-US" sz="1400" dirty="0"/>
           </a:p>
           <a:p>
-            <a:pPr indent="0" marL="0">
+            <a:pPr marL="0" indent="0">
               <a:buNone/>
             </a:pPr>
             <a:r>
@@ -13105,6 +13674,13 @@
             <a:prstDash val="solid"/>
           </a:ln>
         </p:spPr>
+        <p:txBody>
+          <a:bodyPr/>
+          <a:lstStyle/>
+          <a:p>
+            <a:endParaRPr lang="en-IN"/>
+          </a:p>
+        </p:txBody>
       </p:sp>
       <p:sp>
         <p:nvSpPr>
@@ -13130,6 +13706,13 @@
             <a:prstDash val="solid"/>
           </a:ln>
         </p:spPr>
+        <p:txBody>
+          <a:bodyPr/>
+          <a:lstStyle/>
+          <a:p>
+            <a:endParaRPr lang="en-IN"/>
+          </a:p>
+        </p:txBody>
       </p:sp>
       <p:sp>
         <p:nvSpPr>
@@ -13152,7 +13735,7 @@
           <a:bodyPr wrap="square" lIns="0" tIns="0" rIns="0" bIns="0" rtlCol="0" anchor="ctr"/>
           <a:lstStyle/>
           <a:p>
-            <a:pPr algn="ctr" indent="0" marL="0">
+            <a:pPr marL="0" indent="0" algn="ctr">
               <a:buNone/>
             </a:pPr>
             <a:r>
@@ -13191,7 +13774,7 @@
           <a:bodyPr wrap="square" lIns="0" tIns="0" rIns="0" bIns="0" rtlCol="0" anchor="ctr"/>
           <a:lstStyle/>
           <a:p>
-            <a:pPr indent="0" marL="0">
+            <a:pPr marL="0" indent="0">
               <a:buNone/>
             </a:pPr>
             <a:r>
@@ -13208,7 +13791,7 @@
             <a:endParaRPr lang="en-US" sz="1400" dirty="0"/>
           </a:p>
           <a:p>
-            <a:pPr indent="0" marL="0">
+            <a:pPr marL="0" indent="0">
               <a:buNone/>
             </a:pPr>
             <a:r>
@@ -13252,6 +13835,13 @@
             <a:prstDash val="solid"/>
           </a:ln>
         </p:spPr>
+        <p:txBody>
+          <a:bodyPr/>
+          <a:lstStyle/>
+          <a:p>
+            <a:endParaRPr lang="en-IN"/>
+          </a:p>
+        </p:txBody>
       </p:sp>
       <p:sp>
         <p:nvSpPr>
@@ -13277,6 +13867,13 @@
             <a:prstDash val="solid"/>
           </a:ln>
         </p:spPr>
+        <p:txBody>
+          <a:bodyPr/>
+          <a:lstStyle/>
+          <a:p>
+            <a:endParaRPr lang="en-IN"/>
+          </a:p>
+        </p:txBody>
       </p:sp>
       <p:sp>
         <p:nvSpPr>
@@ -13299,7 +13896,7 @@
           <a:bodyPr wrap="square" lIns="0" tIns="0" rIns="0" bIns="0" rtlCol="0" anchor="ctr"/>
           <a:lstStyle/>
           <a:p>
-            <a:pPr algn="ctr" indent="0" marL="0">
+            <a:pPr marL="0" indent="0" algn="ctr">
               <a:buNone/>
             </a:pPr>
             <a:r>
@@ -13338,7 +13935,7 @@
           <a:bodyPr wrap="square" lIns="0" tIns="0" rIns="0" bIns="0" rtlCol="0" anchor="ctr"/>
           <a:lstStyle/>
           <a:p>
-            <a:pPr indent="0" marL="0">
+            <a:pPr marL="0" indent="0">
               <a:buNone/>
             </a:pPr>
             <a:r>
@@ -13355,7 +13952,7 @@
             <a:endParaRPr lang="en-US" sz="1400" dirty="0"/>
           </a:p>
           <a:p>
-            <a:pPr indent="0" marL="0">
+            <a:pPr marL="0" indent="0">
               <a:buNone/>
             </a:pPr>
             <a:r>
@@ -13399,6 +13996,13 @@
             <a:prstDash val="solid"/>
           </a:ln>
         </p:spPr>
+        <p:txBody>
+          <a:bodyPr/>
+          <a:lstStyle/>
+          <a:p>
+            <a:endParaRPr lang="en-IN"/>
+          </a:p>
+        </p:txBody>
       </p:sp>
       <p:sp>
         <p:nvSpPr>
@@ -13424,6 +14028,13 @@
             <a:prstDash val="solid"/>
           </a:ln>
         </p:spPr>
+        <p:txBody>
+          <a:bodyPr/>
+          <a:lstStyle/>
+          <a:p>
+            <a:endParaRPr lang="en-IN"/>
+          </a:p>
+        </p:txBody>
       </p:sp>
       <p:sp>
         <p:nvSpPr>
@@ -13446,7 +14057,7 @@
           <a:bodyPr wrap="square" lIns="0" tIns="0" rIns="0" bIns="0" rtlCol="0" anchor="ctr"/>
           <a:lstStyle/>
           <a:p>
-            <a:pPr algn="ctr" indent="0" marL="0">
+            <a:pPr marL="0" indent="0" algn="ctr">
               <a:buNone/>
             </a:pPr>
             <a:r>
@@ -13485,7 +14096,7 @@
           <a:bodyPr wrap="square" lIns="0" tIns="0" rIns="0" bIns="0" rtlCol="0" anchor="ctr"/>
           <a:lstStyle/>
           <a:p>
-            <a:pPr indent="0" marL="0">
+            <a:pPr marL="0" indent="0">
               <a:buNone/>
             </a:pPr>
             <a:r>
@@ -13502,7 +14113,7 @@
             <a:endParaRPr lang="en-US" sz="1400" dirty="0"/>
           </a:p>
           <a:p>
-            <a:pPr indent="0" marL="0">
+            <a:pPr marL="0" indent="0">
               <a:buNone/>
             </a:pPr>
             <a:r>
@@ -13546,6 +14157,13 @@
             <a:prstDash val="solid"/>
           </a:ln>
         </p:spPr>
+        <p:txBody>
+          <a:bodyPr/>
+          <a:lstStyle/>
+          <a:p>
+            <a:endParaRPr lang="en-IN"/>
+          </a:p>
+        </p:txBody>
       </p:sp>
       <p:sp>
         <p:nvSpPr>
@@ -13571,6 +14189,13 @@
             <a:prstDash val="solid"/>
           </a:ln>
         </p:spPr>
+        <p:txBody>
+          <a:bodyPr/>
+          <a:lstStyle/>
+          <a:p>
+            <a:endParaRPr lang="en-IN"/>
+          </a:p>
+        </p:txBody>
       </p:sp>
       <p:sp>
         <p:nvSpPr>
@@ -13593,7 +14218,7 @@
           <a:bodyPr wrap="square" lIns="0" tIns="0" rIns="0" bIns="0" rtlCol="0" anchor="ctr"/>
           <a:lstStyle/>
           <a:p>
-            <a:pPr algn="ctr" indent="0" marL="0">
+            <a:pPr marL="0" indent="0" algn="ctr">
               <a:buNone/>
             </a:pPr>
             <a:r>
@@ -13632,7 +14257,7 @@
           <a:bodyPr wrap="square" lIns="0" tIns="0" rIns="0" bIns="0" rtlCol="0" anchor="ctr"/>
           <a:lstStyle/>
           <a:p>
-            <a:pPr indent="0" marL="0">
+            <a:pPr marL="0" indent="0">
               <a:buNone/>
             </a:pPr>
             <a:r>
@@ -13649,7 +14274,7 @@
             <a:endParaRPr lang="en-US" sz="1400" dirty="0"/>
           </a:p>
           <a:p>
-            <a:pPr indent="0" marL="0">
+            <a:pPr marL="0" indent="0">
               <a:buNone/>
             </a:pPr>
             <a:r>
@@ -13693,6 +14318,13 @@
             <a:prstDash val="solid"/>
           </a:ln>
         </p:spPr>
+        <p:txBody>
+          <a:bodyPr/>
+          <a:lstStyle/>
+          <a:p>
+            <a:endParaRPr lang="en-IN"/>
+          </a:p>
+        </p:txBody>
       </p:sp>
       <p:sp>
         <p:nvSpPr>
@@ -13718,6 +14350,13 @@
             <a:prstDash val="solid"/>
           </a:ln>
         </p:spPr>
+        <p:txBody>
+          <a:bodyPr/>
+          <a:lstStyle/>
+          <a:p>
+            <a:endParaRPr lang="en-IN"/>
+          </a:p>
+        </p:txBody>
       </p:sp>
       <p:sp>
         <p:nvSpPr>
@@ -13740,7 +14379,7 @@
           <a:bodyPr wrap="square" lIns="0" tIns="0" rIns="0" bIns="0" rtlCol="0" anchor="ctr"/>
           <a:lstStyle/>
           <a:p>
-            <a:pPr algn="ctr" indent="0" marL="0">
+            <a:pPr marL="0" indent="0" algn="ctr">
               <a:buNone/>
             </a:pPr>
             <a:r>
@@ -13779,7 +14418,7 @@
           <a:bodyPr wrap="square" lIns="0" tIns="0" rIns="0" bIns="0" rtlCol="0" anchor="ctr"/>
           <a:lstStyle/>
           <a:p>
-            <a:pPr indent="0" marL="0">
+            <a:pPr marL="0" indent="0">
               <a:buNone/>
             </a:pPr>
             <a:r>
@@ -13796,7 +14435,7 @@
             <a:endParaRPr lang="en-US" sz="1400" dirty="0"/>
           </a:p>
           <a:p>
-            <a:pPr indent="0" marL="0">
+            <a:pPr marL="0" indent="0">
               <a:buNone/>
             </a:pPr>
             <a:r>
@@ -13830,6 +14469,7 @@
         <a:solidFill>
           <a:srgbClr val="FFFFFF"/>
         </a:solidFill>
+        <a:effectLst/>
       </p:bgPr>
     </p:bg>
     <p:spTree>
@@ -13867,11 +14507,11 @@
           <a:bodyPr wrap="square" lIns="0" tIns="0" rIns="0" bIns="0" rtlCol="0" anchor="ctr"/>
           <a:lstStyle/>
           <a:p>
-            <a:pPr indent="0" marL="0">
-              <a:buNone/>
-            </a:pPr>
-            <a:r>
-              <a:rPr lang="en-US" sz="1200" b="1" spc="300" kern="0" dirty="0">
+            <a:pPr marL="0" indent="0">
+              <a:buNone/>
+            </a:pPr>
+            <a:r>
+              <a:rPr lang="en-US" sz="1200" b="1" kern="0" spc="300" dirty="0">
                 <a:solidFill>
                   <a:srgbClr val="0B7A85"/>
                 </a:solidFill>
@@ -13906,7 +14546,7 @@
           <a:bodyPr wrap="square" lIns="0" tIns="0" rIns="0" bIns="0" rtlCol="0" anchor="t"/>
           <a:lstStyle/>
           <a:p>
-            <a:pPr indent="0" marL="0">
+            <a:pPr marL="0" indent="0">
               <a:buNone/>
             </a:pPr>
             <a:r>
@@ -13950,6 +14590,13 @@
             <a:prstDash val="solid"/>
           </a:ln>
         </p:spPr>
+        <p:txBody>
+          <a:bodyPr/>
+          <a:lstStyle/>
+          <a:p>
+            <a:endParaRPr lang="en-IN"/>
+          </a:p>
+        </p:txBody>
       </p:sp>
       <p:sp>
         <p:nvSpPr>
@@ -13972,7 +14619,7 @@
           <a:bodyPr wrap="square" lIns="0" tIns="0" rIns="0" bIns="0" rtlCol="0" anchor="ctr"/>
           <a:lstStyle/>
           <a:p>
-            <a:pPr algn="ctr" indent="0" marL="0">
+            <a:pPr marL="0" indent="0" algn="ctr">
               <a:buNone/>
             </a:pPr>
             <a:r>
@@ -13989,7 +14636,7 @@
             <a:endParaRPr lang="en-US" sz="1400" dirty="0"/>
           </a:p>
           <a:p>
-            <a:pPr algn="ctr" indent="0" marL="0">
+            <a:pPr marL="0" indent="0" algn="ctr">
               <a:buNone/>
             </a:pPr>
             <a:r>
@@ -14030,6 +14677,13 @@
             <a:tailEnd type="triangle"/>
           </a:ln>
         </p:spPr>
+        <p:txBody>
+          <a:bodyPr/>
+          <a:lstStyle/>
+          <a:p>
+            <a:endParaRPr lang="en-IN"/>
+          </a:p>
+        </p:txBody>
       </p:sp>
       <p:sp>
         <p:nvSpPr>
@@ -14057,6 +14711,13 @@
             <a:prstDash val="solid"/>
           </a:ln>
         </p:spPr>
+        <p:txBody>
+          <a:bodyPr/>
+          <a:lstStyle/>
+          <a:p>
+            <a:endParaRPr lang="en-IN"/>
+          </a:p>
+        </p:txBody>
       </p:sp>
       <p:sp>
         <p:nvSpPr>
@@ -14079,7 +14740,7 @@
           <a:bodyPr wrap="square" lIns="0" tIns="0" rIns="0" bIns="0" rtlCol="0" anchor="ctr"/>
           <a:lstStyle/>
           <a:p>
-            <a:pPr algn="ctr" indent="0" marL="0">
+            <a:pPr marL="0" indent="0" algn="ctr">
               <a:buNone/>
             </a:pPr>
             <a:r>
@@ -14096,7 +14757,7 @@
             <a:endParaRPr lang="en-US" sz="1400" dirty="0"/>
           </a:p>
           <a:p>
-            <a:pPr algn="ctr" indent="0" marL="0">
+            <a:pPr marL="0" indent="0" algn="ctr">
               <a:buNone/>
             </a:pPr>
             <a:r>
@@ -14137,6 +14798,13 @@
             <a:tailEnd type="triangle"/>
           </a:ln>
         </p:spPr>
+        <p:txBody>
+          <a:bodyPr/>
+          <a:lstStyle/>
+          <a:p>
+            <a:endParaRPr lang="en-IN"/>
+          </a:p>
+        </p:txBody>
       </p:sp>
       <p:sp>
         <p:nvSpPr>
@@ -14164,6 +14832,13 @@
             <a:prstDash val="solid"/>
           </a:ln>
         </p:spPr>
+        <p:txBody>
+          <a:bodyPr/>
+          <a:lstStyle/>
+          <a:p>
+            <a:endParaRPr lang="en-IN"/>
+          </a:p>
+        </p:txBody>
       </p:sp>
       <p:sp>
         <p:nvSpPr>
@@ -14186,7 +14861,7 @@
           <a:bodyPr wrap="square" lIns="0" tIns="0" rIns="0" bIns="0" rtlCol="0" anchor="ctr"/>
           <a:lstStyle/>
           <a:p>
-            <a:pPr algn="ctr" indent="0" marL="0">
+            <a:pPr marL="0" indent="0" algn="ctr">
               <a:buNone/>
             </a:pPr>
             <a:r>
@@ -14203,7 +14878,7 @@
             <a:endParaRPr lang="en-US" sz="1400" dirty="0"/>
           </a:p>
           <a:p>
-            <a:pPr algn="ctr" indent="0" marL="0">
+            <a:pPr marL="0" indent="0" algn="ctr">
               <a:buNone/>
             </a:pPr>
             <a:r>
@@ -14244,6 +14919,13 @@
             <a:tailEnd type="triangle"/>
           </a:ln>
         </p:spPr>
+        <p:txBody>
+          <a:bodyPr/>
+          <a:lstStyle/>
+          <a:p>
+            <a:endParaRPr lang="en-IN"/>
+          </a:p>
+        </p:txBody>
       </p:sp>
       <p:sp>
         <p:nvSpPr>
@@ -14271,6 +14953,13 @@
             <a:prstDash val="solid"/>
           </a:ln>
         </p:spPr>
+        <p:txBody>
+          <a:bodyPr/>
+          <a:lstStyle/>
+          <a:p>
+            <a:endParaRPr lang="en-IN"/>
+          </a:p>
+        </p:txBody>
       </p:sp>
       <p:sp>
         <p:nvSpPr>
@@ -14293,7 +14982,7 @@
           <a:bodyPr wrap="square" lIns="0" tIns="0" rIns="0" bIns="0" rtlCol="0" anchor="ctr"/>
           <a:lstStyle/>
           <a:p>
-            <a:pPr algn="ctr" indent="0" marL="0">
+            <a:pPr marL="0" indent="0" algn="ctr">
               <a:buNone/>
             </a:pPr>
             <a:r>
@@ -14310,7 +14999,7 @@
             <a:endParaRPr lang="en-US" sz="1400" dirty="0"/>
           </a:p>
           <a:p>
-            <a:pPr algn="ctr" indent="0" marL="0">
+            <a:pPr marL="0" indent="0" algn="ctr">
               <a:buNone/>
             </a:pPr>
             <a:r>
@@ -14354,6 +15043,13 @@
             <a:prstDash val="solid"/>
           </a:ln>
         </p:spPr>
+        <p:txBody>
+          <a:bodyPr/>
+          <a:lstStyle/>
+          <a:p>
+            <a:endParaRPr lang="en-IN"/>
+          </a:p>
+        </p:txBody>
       </p:sp>
       <p:sp>
         <p:nvSpPr>
@@ -14376,7 +15072,7 @@
           <a:bodyPr wrap="square" lIns="0" tIns="0" rIns="0" bIns="0" rtlCol="0" anchor="ctr"/>
           <a:lstStyle/>
           <a:p>
-            <a:pPr indent="0" marL="0">
+            <a:pPr marL="0" indent="0">
               <a:buNone/>
             </a:pPr>
             <a:r>
@@ -14415,7 +15111,7 @@
           <a:bodyPr wrap="square" lIns="0" tIns="0" rIns="0" bIns="0" rtlCol="0" anchor="t"/>
           <a:lstStyle/>
           <a:p>
-            <a:pPr indent="0" marL="0">
+            <a:pPr marL="0" indent="0">
               <a:buNone/>
             </a:pPr>
             <a:r>
@@ -14459,6 +15155,13 @@
             <a:prstDash val="solid"/>
           </a:ln>
         </p:spPr>
+        <p:txBody>
+          <a:bodyPr/>
+          <a:lstStyle/>
+          <a:p>
+            <a:endParaRPr lang="en-IN"/>
+          </a:p>
+        </p:txBody>
       </p:sp>
       <p:sp>
         <p:nvSpPr>
@@ -14481,7 +15184,7 @@
           <a:bodyPr wrap="square" lIns="0" tIns="0" rIns="0" bIns="0" rtlCol="0" anchor="ctr"/>
           <a:lstStyle/>
           <a:p>
-            <a:pPr indent="0" marL="0">
+            <a:pPr marL="0" indent="0">
               <a:buNone/>
             </a:pPr>
             <a:r>
@@ -14520,7 +15223,7 @@
           <a:bodyPr wrap="square" lIns="0" tIns="0" rIns="0" bIns="0" rtlCol="0" anchor="t"/>
           <a:lstStyle/>
           <a:p>
-            <a:pPr indent="0" marL="0">
+            <a:pPr marL="0" indent="0">
               <a:buNone/>
             </a:pPr>
             <a:r>
@@ -14564,6 +15267,13 @@
             <a:prstDash val="solid"/>
           </a:ln>
         </p:spPr>
+        <p:txBody>
+          <a:bodyPr/>
+          <a:lstStyle/>
+          <a:p>
+            <a:endParaRPr lang="en-IN"/>
+          </a:p>
+        </p:txBody>
       </p:sp>
       <p:sp>
         <p:nvSpPr>
@@ -14586,7 +15296,7 @@
           <a:bodyPr wrap="square" lIns="0" tIns="0" rIns="0" bIns="0" rtlCol="0" anchor="ctr"/>
           <a:lstStyle/>
           <a:p>
-            <a:pPr indent="0" marL="0">
+            <a:pPr marL="0" indent="0">
               <a:buNone/>
             </a:pPr>
             <a:r>
@@ -14625,7 +15335,7 @@
           <a:bodyPr wrap="square" lIns="0" tIns="0" rIns="0" bIns="0" rtlCol="0" anchor="t"/>
           <a:lstStyle/>
           <a:p>
-            <a:pPr indent="0" marL="0">
+            <a:pPr marL="0" indent="0">
               <a:buNone/>
             </a:pPr>
             <a:r>
@@ -14944,4 +15654,319 @@
     </a:ext>
   </a:extLst>
 </a:theme>
+</file>
+
+<file path=ppt/theme/theme2.xml><?xml version="1.0" encoding="utf-8"?>
+<a:theme xmlns:a="http://schemas.openxmlformats.org/drawingml/2006/main" name="Office Theme">
+  <a:themeElements>
+    <a:clrScheme name="Office">
+      <a:dk1>
+        <a:sysClr val="windowText" lastClr="000000"/>
+      </a:dk1>
+      <a:lt1>
+        <a:sysClr val="window" lastClr="FFFFFF"/>
+      </a:lt1>
+      <a:dk2>
+        <a:srgbClr val="0E2841"/>
+      </a:dk2>
+      <a:lt2>
+        <a:srgbClr val="E8E8E8"/>
+      </a:lt2>
+      <a:accent1>
+        <a:srgbClr val="156082"/>
+      </a:accent1>
+      <a:accent2>
+        <a:srgbClr val="E97132"/>
+      </a:accent2>
+      <a:accent3>
+        <a:srgbClr val="196B24"/>
+      </a:accent3>
+      <a:accent4>
+        <a:srgbClr val="0F9ED5"/>
+      </a:accent4>
+      <a:accent5>
+        <a:srgbClr val="A02B93"/>
+      </a:accent5>
+      <a:accent6>
+        <a:srgbClr val="4EA72E"/>
+      </a:accent6>
+      <a:hlink>
+        <a:srgbClr val="467886"/>
+      </a:hlink>
+      <a:folHlink>
+        <a:srgbClr val="96607D"/>
+      </a:folHlink>
+    </a:clrScheme>
+    <a:fontScheme name="Office">
+      <a:majorFont>
+        <a:latin typeface="Aptos Display" panose="02110004020202020204"/>
+        <a:ea typeface=""/>
+        <a:cs typeface=""/>
+        <a:font script="Jpan" typeface="游ゴシック Light"/>
+        <a:font script="Hang" typeface="맑은 고딕"/>
+        <a:font script="Hans" typeface="等线 Light"/>
+        <a:font script="Hant" typeface="新細明體"/>
+        <a:font script="Arab" typeface="Times New Roman"/>
+        <a:font script="Hebr" typeface="Times New Roman"/>
+        <a:font script="Thai" typeface="Angsana New"/>
+        <a:font script="Ethi" typeface="Nyala"/>
+        <a:font script="Beng" typeface="Vrinda"/>
+        <a:font script="Gujr" typeface="Shruti"/>
+        <a:font script="Khmr" typeface="MoolBoran"/>
+        <a:font script="Knda" typeface="Tunga"/>
+        <a:font script="Guru" typeface="Raavi"/>
+        <a:font script="Cans" typeface="Euphemia"/>
+        <a:font script="Cher" typeface="Plantagenet Cherokee"/>
+        <a:font script="Yiii" typeface="Microsoft Yi Baiti"/>
+        <a:font script="Tibt" typeface="Microsoft Himalaya"/>
+        <a:font script="Thaa" typeface="MV Boli"/>
+        <a:font script="Deva" typeface="Mangal"/>
+        <a:font script="Telu" typeface="Gautami"/>
+        <a:font script="Taml" typeface="Latha"/>
+        <a:font script="Syrc" typeface="Estrangelo Edessa"/>
+        <a:font script="Orya" typeface="Kalinga"/>
+        <a:font script="Mlym" typeface="Kartika"/>
+        <a:font script="Laoo" typeface="DokChampa"/>
+        <a:font script="Sinh" typeface="Iskoola Pota"/>
+        <a:font script="Mong" typeface="Mongolian Baiti"/>
+        <a:font script="Viet" typeface="Times New Roman"/>
+        <a:font script="Uigh" typeface="Microsoft Uighur"/>
+        <a:font script="Geor" typeface="Sylfaen"/>
+        <a:font script="Armn" typeface="Arial"/>
+        <a:font script="Bugi" typeface="Leelawadee UI"/>
+        <a:font script="Bopo" typeface="Microsoft JhengHei"/>
+        <a:font script="Java" typeface="Javanese Text"/>
+        <a:font script="Lisu" typeface="Segoe UI"/>
+        <a:font script="Mymr" typeface="Myanmar Text"/>
+        <a:font script="Nkoo" typeface="Ebrima"/>
+        <a:font script="Olck" typeface="Nirmala UI"/>
+        <a:font script="Osma" typeface="Ebrima"/>
+        <a:font script="Phag" typeface="Phagspa"/>
+        <a:font script="Syrn" typeface="Estrangelo Edessa"/>
+        <a:font script="Syrj" typeface="Estrangelo Edessa"/>
+        <a:font script="Syre" typeface="Estrangelo Edessa"/>
+        <a:font script="Sora" typeface="Nirmala UI"/>
+        <a:font script="Tale" typeface="Microsoft Tai Le"/>
+        <a:font script="Talu" typeface="Microsoft New Tai Lue"/>
+        <a:font script="Tfng" typeface="Ebrima"/>
+      </a:majorFont>
+      <a:minorFont>
+        <a:latin typeface="Aptos" panose="02110004020202020204"/>
+        <a:ea typeface=""/>
+        <a:cs typeface=""/>
+        <a:font script="Jpan" typeface="游ゴシック"/>
+        <a:font script="Hang" typeface="맑은 고딕"/>
+        <a:font script="Hans" typeface="等线"/>
+        <a:font script="Hant" typeface="新細明體"/>
+        <a:font script="Arab" typeface="Arial"/>
+        <a:font script="Hebr" typeface="Arial"/>
+        <a:font script="Thai" typeface="Cordia New"/>
+        <a:font script="Ethi" typeface="Nyala"/>
+        <a:font script="Beng" typeface="Vrinda"/>
+        <a:font script="Gujr" typeface="Shruti"/>
+        <a:font script="Khmr" typeface="DaunPenh"/>
+        <a:font script="Knda" typeface="Tunga"/>
+        <a:font script="Guru" typeface="Raavi"/>
+        <a:font script="Cans" typeface="Euphemia"/>
+        <a:font script="Cher" typeface="Plantagenet Cherokee"/>
+        <a:font script="Yiii" typeface="Microsoft Yi Baiti"/>
+        <a:font script="Tibt" typeface="Microsoft Himalaya"/>
+        <a:font script="Thaa" typeface="MV Boli"/>
+        <a:font script="Deva" typeface="Mangal"/>
+        <a:font script="Telu" typeface="Gautami"/>
+        <a:font script="Taml" typeface="Latha"/>
+        <a:font script="Syrc" typeface="Estrangelo Edessa"/>
+        <a:font script="Orya" typeface="Kalinga"/>
+        <a:font script="Mlym" typeface="Kartika"/>
+        <a:font script="Laoo" typeface="DokChampa"/>
+        <a:font script="Sinh" typeface="Iskoola Pota"/>
+        <a:font script="Mong" typeface="Mongolian Baiti"/>
+        <a:font script="Viet" typeface="Arial"/>
+        <a:font script="Uigh" typeface="Microsoft Uighur"/>
+        <a:font script="Geor" typeface="Sylfaen"/>
+        <a:font script="Armn" typeface="Arial"/>
+        <a:font script="Bugi" typeface="Leelawadee UI"/>
+        <a:font script="Bopo" typeface="Microsoft JhengHei"/>
+        <a:font script="Java" typeface="Javanese Text"/>
+        <a:font script="Lisu" typeface="Segoe UI"/>
+        <a:font script="Mymr" typeface="Myanmar Text"/>
+        <a:font script="Nkoo" typeface="Ebrima"/>
+        <a:font script="Olck" typeface="Nirmala UI"/>
+        <a:font script="Osma" typeface="Ebrima"/>
+        <a:font script="Phag" typeface="Phagspa"/>
+        <a:font script="Syrn" typeface="Estrangelo Edessa"/>
+        <a:font script="Syrj" typeface="Estrangelo Edessa"/>
+        <a:font script="Syre" typeface="Estrangelo Edessa"/>
+        <a:font script="Sora" typeface="Nirmala UI"/>
+        <a:font script="Tale" typeface="Microsoft Tai Le"/>
+        <a:font script="Talu" typeface="Microsoft New Tai Lue"/>
+        <a:font script="Tfng" typeface="Ebrima"/>
+      </a:minorFont>
+    </a:fontScheme>
+    <a:fmtScheme name="Office">
+      <a:fillStyleLst>
+        <a:solidFill>
+          <a:schemeClr val="phClr"/>
+        </a:solidFill>
+        <a:gradFill rotWithShape="1">
+          <a:gsLst>
+            <a:gs pos="0">
+              <a:schemeClr val="phClr">
+                <a:lumMod val="110000"/>
+                <a:satMod val="105000"/>
+                <a:tint val="67000"/>
+              </a:schemeClr>
+            </a:gs>
+            <a:gs pos="50000">
+              <a:schemeClr val="phClr">
+                <a:lumMod val="105000"/>
+                <a:satMod val="103000"/>
+                <a:tint val="73000"/>
+              </a:schemeClr>
+            </a:gs>
+            <a:gs pos="100000">
+              <a:schemeClr val="phClr">
+                <a:lumMod val="105000"/>
+                <a:satMod val="109000"/>
+                <a:tint val="81000"/>
+              </a:schemeClr>
+            </a:gs>
+          </a:gsLst>
+          <a:lin ang="5400000" scaled="0"/>
+        </a:gradFill>
+        <a:gradFill rotWithShape="1">
+          <a:gsLst>
+            <a:gs pos="0">
+              <a:schemeClr val="phClr">
+                <a:satMod val="103000"/>
+                <a:lumMod val="102000"/>
+                <a:tint val="94000"/>
+              </a:schemeClr>
+            </a:gs>
+            <a:gs pos="50000">
+              <a:schemeClr val="phClr">
+                <a:satMod val="110000"/>
+                <a:lumMod val="100000"/>
+                <a:shade val="100000"/>
+              </a:schemeClr>
+            </a:gs>
+            <a:gs pos="100000">
+              <a:schemeClr val="phClr">
+                <a:lumMod val="99000"/>
+                <a:satMod val="120000"/>
+                <a:shade val="78000"/>
+              </a:schemeClr>
+            </a:gs>
+          </a:gsLst>
+          <a:lin ang="5400000" scaled="0"/>
+        </a:gradFill>
+      </a:fillStyleLst>
+      <a:lnStyleLst>
+        <a:ln w="12700" cap="flat" cmpd="sng" algn="ctr">
+          <a:solidFill>
+            <a:schemeClr val="phClr"/>
+          </a:solidFill>
+          <a:prstDash val="solid"/>
+          <a:miter lim="800000"/>
+        </a:ln>
+        <a:ln w="19050" cap="flat" cmpd="sng" algn="ctr">
+          <a:solidFill>
+            <a:schemeClr val="phClr"/>
+          </a:solidFill>
+          <a:prstDash val="solid"/>
+          <a:miter lim="800000"/>
+        </a:ln>
+        <a:ln w="25400" cap="flat" cmpd="sng" algn="ctr">
+          <a:solidFill>
+            <a:schemeClr val="phClr"/>
+          </a:solidFill>
+          <a:prstDash val="solid"/>
+          <a:miter lim="800000"/>
+        </a:ln>
+      </a:lnStyleLst>
+      <a:effectStyleLst>
+        <a:effectStyle>
+          <a:effectLst/>
+        </a:effectStyle>
+        <a:effectStyle>
+          <a:effectLst/>
+        </a:effectStyle>
+        <a:effectStyle>
+          <a:effectLst>
+            <a:outerShdw blurRad="57150" dist="19050" dir="5400000" algn="ctr" rotWithShape="0">
+              <a:srgbClr val="000000">
+                <a:alpha val="63000"/>
+              </a:srgbClr>
+            </a:outerShdw>
+          </a:effectLst>
+        </a:effectStyle>
+      </a:effectStyleLst>
+      <a:bgFillStyleLst>
+        <a:solidFill>
+          <a:schemeClr val="phClr"/>
+        </a:solidFill>
+        <a:solidFill>
+          <a:schemeClr val="phClr">
+            <a:tint val="95000"/>
+            <a:satMod val="170000"/>
+          </a:schemeClr>
+        </a:solidFill>
+        <a:gradFill rotWithShape="1">
+          <a:gsLst>
+            <a:gs pos="0">
+              <a:schemeClr val="phClr">
+                <a:tint val="93000"/>
+                <a:satMod val="150000"/>
+                <a:shade val="98000"/>
+                <a:lumMod val="102000"/>
+              </a:schemeClr>
+            </a:gs>
+            <a:gs pos="50000">
+              <a:schemeClr val="phClr">
+                <a:tint val="98000"/>
+                <a:satMod val="130000"/>
+                <a:shade val="90000"/>
+                <a:lumMod val="103000"/>
+              </a:schemeClr>
+            </a:gs>
+            <a:gs pos="100000">
+              <a:schemeClr val="phClr">
+                <a:shade val="63000"/>
+                <a:satMod val="120000"/>
+              </a:schemeClr>
+            </a:gs>
+          </a:gsLst>
+          <a:lin ang="5400000" scaled="0"/>
+        </a:gradFill>
+      </a:bgFillStyleLst>
+    </a:fmtScheme>
+  </a:themeElements>
+  <a:objectDefaults>
+    <a:lnDef>
+      <a:spPr/>
+      <a:bodyPr/>
+      <a:lstStyle/>
+      <a:style>
+        <a:lnRef idx="2">
+          <a:schemeClr val="accent1"/>
+        </a:lnRef>
+        <a:fillRef idx="0">
+          <a:schemeClr val="accent1"/>
+        </a:fillRef>
+        <a:effectRef idx="1">
+          <a:schemeClr val="accent1"/>
+        </a:effectRef>
+        <a:fontRef idx="minor">
+          <a:schemeClr val="tx1"/>
+        </a:fontRef>
+      </a:style>
+    </a:lnDef>
+  </a:objectDefaults>
+  <a:extraClrSchemeLst/>
+  <a:extLst>
+    <a:ext uri="{05A4C25C-085E-4340-85A3-A5531E510DB2}">
+      <thm15:themeFamily xmlns:thm15="http://schemas.microsoft.com/office/thememl/2012/main" name="Office Theme" id="{2E142A2C-CD16-42D6-873A-C26D2A0506FA}" vid="{1BDDFF52-6CD6-40A5-AB3C-68EB2F1E4D0A}"/>
+    </a:ext>
+  </a:extLst>
+</a:theme>
 </file>